--- a/presentation/project_presentation.pptx
+++ b/presentation/project_presentation.pptx
@@ -17,6 +17,10 @@
     <p:sldId id="265" r:id="rId16"/>
     <p:sldId id="266" r:id="rId17"/>
     <p:sldId id="267" r:id="rId18"/>
+    <p:sldId id="268" r:id="rId19"/>
+    <p:sldId id="269" r:id="rId20"/>
+    <p:sldId id="270" r:id="rId21"/>
+    <p:sldId id="271" r:id="rId22"/>
   </p:sldIdLst>
   <p:sldSz cx="12191695" cy="6858000" type="screen4x3"/>
   <p:notesSz cx="6858000" cy="9144000"/>
@@ -3095,7 +3099,7 @@
     <p:bg>
       <p:bgPr>
         <a:solidFill>
-          <a:srgbClr val="0C172A"/>
+          <a:srgbClr val="F8FAFC"/>
         </a:solidFill>
         <a:effectLst/>
       </p:bgPr>
@@ -3115,8 +3119,8 @@
         </p:nvSpPr>
         <p:spPr>
           <a:xfrm>
-            <a:off x="822960" y="1920240"/>
-            <a:ext cx="10515600" cy="1371600"/>
+            <a:off x="822960" y="1828800"/>
+            <a:ext cx="10607040" cy="731520"/>
           </a:xfrm>
           <a:prstGeom prst="rect">
             <a:avLst/>
@@ -3124,33 +3128,93 @@
           <a:noFill/>
         </p:spPr>
         <p:txBody>
-          <a:bodyPr wrap="none">
-            <a:spAutoFit/>
+          <a:bodyPr wrap="square">
+            <a:normAutofit/>
           </a:bodyPr>
           <a:lstStyle/>
           <a:p>
             <a:pPr algn="ctr">
               <a:defRPr sz="3800" b="1">
                 <a:solidFill>
-                  <a:srgbClr val="F1F5F9"/>
-                </a:solidFill>
-                <a:latin typeface="Aptos Display"/>
+                  <a:srgbClr val="0F172A"/>
+                </a:solidFill>
+                <a:latin typeface="Aptos"/>
               </a:defRPr>
             </a:pPr>
             <a:r>
               <a:t>Programming Error Pattern Recognition</a:t>
             </a:r>
           </a:p>
+        </p:txBody>
+      </p:sp>
+      <p:sp>
+        <p:nvSpPr>
+          <p:cNvPr id="3" name="TextBox 2"/>
+          <p:cNvSpPr txBox="1"/>
+          <p:nvPr/>
+        </p:nvSpPr>
+        <p:spPr>
+          <a:xfrm>
+            <a:off x="1280160" y="2606040"/>
+            <a:ext cx="9692640" cy="411480"/>
+          </a:xfrm>
+          <a:prstGeom prst="rect">
+            <a:avLst/>
+          </a:prstGeom>
+          <a:noFill/>
+        </p:spPr>
+        <p:txBody>
+          <a:bodyPr wrap="square">
+            <a:normAutofit/>
+          </a:bodyPr>
+          <a:lstStyle/>
           <a:p>
             <a:pPr algn="ctr">
-              <a:defRPr sz="2000">
-                <a:solidFill>
-                  <a:srgbClr val="22D3EE"/>
-                </a:solidFill>
+              <a:defRPr sz="1800" b="0">
+                <a:solidFill>
+                  <a:srgbClr val="0D9488"/>
+                </a:solidFill>
+                <a:latin typeface="Aptos"/>
               </a:defRPr>
             </a:pPr>
             <a:r>
-              <a:t>A dual synthetic and real-data evaluation</a:t>
+              <a:t>Pattern recognition project: prototype, real-data validation, and BIFI comparison</a:t>
+            </a:r>
+          </a:p>
+        </p:txBody>
+      </p:sp>
+      <p:sp>
+        <p:nvSpPr>
+          <p:cNvPr id="4" name="TextBox 3"/>
+          <p:cNvSpPr txBox="1"/>
+          <p:nvPr/>
+        </p:nvSpPr>
+        <p:spPr>
+          <a:xfrm>
+            <a:off x="1463040" y="3657600"/>
+            <a:ext cx="9326880" cy="502920"/>
+          </a:xfrm>
+          <a:prstGeom prst="rect">
+            <a:avLst/>
+          </a:prstGeom>
+          <a:noFill/>
+        </p:spPr>
+        <p:txBody>
+          <a:bodyPr wrap="square">
+            <a:normAutofit/>
+          </a:bodyPr>
+          <a:lstStyle/>
+          <a:p>
+            <a:pPr algn="ctr">
+              <a:defRPr sz="2000" b="0">
+                <a:solidFill>
+                  <a:srgbClr val="475569"/>
+                </a:solidFill>
+                <a:latin typeface="Aptos"/>
+              </a:defRPr>
+            </a:pPr>
+            <a:r>
+              <a:t>Goal: help instructors identify recurring programming mistakes without replacing human review.</a:t>
             </a:r>
           </a:p>
         </p:txBody>
@@ -3169,7 +3233,7 @@
     <p:bg>
       <p:bgPr>
         <a:solidFill>
-          <a:srgbClr val="0C172A"/>
+          <a:srgbClr val="F8FAFC"/>
         </a:solidFill>
         <a:effectLst/>
       </p:bgPr>
@@ -3189,8 +3253,8 @@
         </p:nvSpPr>
         <p:spPr>
           <a:xfrm>
-            <a:off x="640080" y="411480"/>
-            <a:ext cx="10881360" cy="731520"/>
+            <a:off x="502920" y="320040"/>
+            <a:ext cx="11155680" cy="502920"/>
           </a:xfrm>
           <a:prstGeom prst="rect">
             <a:avLst/>
@@ -3198,230 +3262,21 @@
           <a:noFill/>
         </p:spPr>
         <p:txBody>
-          <a:bodyPr wrap="none">
-            <a:spAutoFit/>
+          <a:bodyPr wrap="square">
+            <a:normAutofit/>
           </a:bodyPr>
           <a:lstStyle/>
           <a:p>
             <a:pPr>
-              <a:defRPr sz="2800" b="1">
-                <a:solidFill>
-                  <a:srgbClr val="F1F5F9"/>
-                </a:solidFill>
-                <a:latin typeface="Aptos Display"/>
+              <a:defRPr sz="2700" b="1">
+                <a:solidFill>
+                  <a:srgbClr val="0F172A"/>
+                </a:solidFill>
+                <a:latin typeface="Aptos"/>
               </a:defRPr>
             </a:pPr>
             <a:r>
-              <a:t>Measured SVM results</a:t>
-            </a:r>
-          </a:p>
-        </p:txBody>
-      </p:sp>
-      <p:sp>
-        <p:nvSpPr>
-          <p:cNvPr id="3" name="TextBox 2"/>
-          <p:cNvSpPr txBox="1"/>
-          <p:nvPr/>
-        </p:nvSpPr>
-        <p:spPr>
-          <a:xfrm>
-            <a:off x="658368" y="1051560"/>
-            <a:ext cx="10515600" cy="411480"/>
-          </a:xfrm>
-          <a:prstGeom prst="rect">
-            <a:avLst/>
-          </a:prstGeom>
-          <a:noFill/>
-        </p:spPr>
-        <p:txBody>
-          <a:bodyPr wrap="none">
-            <a:spAutoFit/>
-          </a:bodyPr>
-          <a:lstStyle/>
-          <a:p>
-            <a:pPr>
-              <a:defRPr sz="1300">
-                <a:solidFill>
-                  <a:srgbClr val="22D3EE"/>
-                </a:solidFill>
-                <a:latin typeface="Aptos"/>
-              </a:defRPr>
-            </a:pPr>
-            <a:r>
-              <a:t>No estimated or placeholder model scores</a:t>
-            </a:r>
-          </a:p>
-        </p:txBody>
-      </p:sp>
-      <p:pic>
-        <p:nvPicPr>
-          <p:cNvPr id="4" name="Picture 3" descr="svm_metrics.png"/>
-          <p:cNvPicPr>
-            <a:picLocks noChangeAspect="1"/>
-          </p:cNvPicPr>
-          <p:nvPr/>
-        </p:nvPicPr>
-        <p:blipFill>
-          <a:blip r:embed="rId2"/>
-          <a:stretch>
-            <a:fillRect/>
-          </a:stretch>
-        </p:blipFill>
-        <p:spPr>
-          <a:xfrm>
-            <a:off x="640080" y="1417320"/>
-            <a:ext cx="5669280" cy="3188970"/>
-          </a:xfrm>
-          <a:prstGeom prst="rect">
-            <a:avLst/>
-          </a:prstGeom>
-        </p:spPr>
-      </p:pic>
-      <p:sp>
-        <p:nvSpPr>
-          <p:cNvPr id="5" name="TextBox 4"/>
-          <p:cNvSpPr txBox="1"/>
-          <p:nvPr/>
-        </p:nvSpPr>
-        <p:spPr>
-          <a:xfrm>
-            <a:off x="6537960" y="1600200"/>
-            <a:ext cx="4937760" cy="4663440"/>
-          </a:xfrm>
-          <a:prstGeom prst="rect">
-            <a:avLst/>
-          </a:prstGeom>
-          <a:noFill/>
-        </p:spPr>
-        <p:txBody>
-          <a:bodyPr wrap="none">
-            <a:spAutoFit/>
-          </a:bodyPr>
-          <a:lstStyle/>
-          <a:p>
-            <a:pPr>
-              <a:spcAft>
-                <a:spcPts val="1700"/>
-              </a:spcAft>
-              <a:defRPr sz="2100">
-                <a:solidFill>
-                  <a:srgbClr val="F1F5F9"/>
-                </a:solidFill>
-                <a:latin typeface="Aptos"/>
-              </a:defRPr>
-            </a:pPr>
-            <a:r>
-              <a:t>Synthetic: accuracy 0.898; Macro F1 0.903.</a:t>
-            </a:r>
-          </a:p>
-          <a:p>
-            <a:pPr>
-              <a:spcAft>
-                <a:spcPts val="1700"/>
-              </a:spcAft>
-              <a:defRPr sz="2100">
-                <a:solidFill>
-                  <a:srgbClr val="F1F5F9"/>
-                </a:solidFill>
-                <a:latin typeface="Aptos"/>
-              </a:defRPr>
-            </a:pPr>
-            <a:r>
-              <a:t>CodeContests: accuracy 0.705; Macro F1 0.440.</a:t>
-            </a:r>
-          </a:p>
-          <a:p>
-            <a:pPr>
-              <a:spcAft>
-                <a:spcPts val="1700"/>
-              </a:spcAft>
-              <a:defRPr sz="2100">
-                <a:solidFill>
-                  <a:srgbClr val="F1F5F9"/>
-                </a:solidFill>
-                <a:latin typeface="Aptos"/>
-              </a:defRPr>
-            </a:pPr>
-            <a:r>
-              <a:t>Real test imbalance: 2,000 correct vs 59 syntax-error samples.</a:t>
-            </a:r>
-          </a:p>
-          <a:p>
-            <a:pPr>
-              <a:spcAft>
-                <a:spcPts val="1700"/>
-              </a:spcAft>
-              <a:defRPr sz="2100">
-                <a:solidFill>
-                  <a:srgbClr val="F1F5F9"/>
-                </a:solidFill>
-                <a:latin typeface="Aptos"/>
-              </a:defRPr>
-            </a:pPr>
-            <a:r>
-              <a:t>Accuracy overstates minority-class performance.</a:t>
-            </a:r>
-          </a:p>
-        </p:txBody>
-      </p:sp>
-    </p:spTree>
-  </p:cSld>
-  <p:clrMapOvr>
-    <a:masterClrMapping/>
-  </p:clrMapOvr>
-</p:sld>
-</file>
-
-<file path=ppt/slides/slide11.xml><?xml version="1.0" encoding="utf-8"?>
-<p:sld xmlns:a="http://schemas.openxmlformats.org/drawingml/2006/main" xmlns:p="http://schemas.openxmlformats.org/presentationml/2006/main" xmlns:r="http://schemas.openxmlformats.org/officeDocument/2006/relationships">
-  <p:cSld>
-    <p:bg>
-      <p:bgPr>
-        <a:solidFill>
-          <a:srgbClr val="0C172A"/>
-        </a:solidFill>
-        <a:effectLst/>
-      </p:bgPr>
-    </p:bg>
-    <p:spTree>
-      <p:nvGrpSpPr>
-        <p:cNvPr id="1" name=""/>
-        <p:cNvGrpSpPr/>
-        <p:nvPr/>
-      </p:nvGrpSpPr>
-      <p:grpSpPr/>
-      <p:sp>
-        <p:nvSpPr>
-          <p:cNvPr id="2" name="TextBox 1"/>
-          <p:cNvSpPr txBox="1"/>
-          <p:nvPr/>
-        </p:nvSpPr>
-        <p:spPr>
-          <a:xfrm>
-            <a:off x="640080" y="411480"/>
-            <a:ext cx="10881360" cy="731520"/>
-          </a:xfrm>
-          <a:prstGeom prst="rect">
-            <a:avLst/>
-          </a:prstGeom>
-          <a:noFill/>
-        </p:spPr>
-        <p:txBody>
-          <a:bodyPr wrap="none">
-            <a:spAutoFit/>
-          </a:bodyPr>
-          <a:lstStyle/>
-          <a:p>
-            <a:pPr>
-              <a:defRPr sz="2800" b="1">
-                <a:solidFill>
-                  <a:srgbClr val="F1F5F9"/>
-                </a:solidFill>
-                <a:latin typeface="Aptos Display"/>
-              </a:defRPr>
-            </a:pPr>
-            <a:r>
-              <a:t>Confusion matrices and dashboard</a:t>
+              <a:t>Confusion matrices</a:t>
             </a:r>
           </a:p>
         </p:txBody>
@@ -3442,8 +3297,8 @@
         </p:blipFill>
         <p:spPr>
           <a:xfrm>
-            <a:off x="457200" y="1234440"/>
-            <a:ext cx="5212080" cy="4095206"/>
+            <a:off x="228600" y="1143000"/>
+            <a:ext cx="3794760" cy="2846070"/>
           </a:xfrm>
           <a:prstGeom prst="rect">
             <a:avLst/>
@@ -3466,24 +3321,48 @@
         </p:blipFill>
         <p:spPr>
           <a:xfrm>
-            <a:off x="5760720" y="1234440"/>
-            <a:ext cx="5212080" cy="4095206"/>
+            <a:off x="4160520" y="1143000"/>
+            <a:ext cx="3794760" cy="2846070"/>
           </a:xfrm>
           <a:prstGeom prst="rect">
             <a:avLst/>
           </a:prstGeom>
         </p:spPr>
       </p:pic>
-      <p:sp>
-        <p:nvSpPr>
-          <p:cNvPr id="5" name="TextBox 4"/>
+      <p:pic>
+        <p:nvPicPr>
+          <p:cNvPr id="5" name="Picture 4" descr="codecontests_codebert_reduced_confusion.png"/>
+          <p:cNvPicPr>
+            <a:picLocks noChangeAspect="1"/>
+          </p:cNvPicPr>
+          <p:nvPr/>
+        </p:nvPicPr>
+        <p:blipFill>
+          <a:blip r:embed="rId4"/>
+          <a:stretch>
+            <a:fillRect/>
+          </a:stretch>
+        </p:blipFill>
+        <p:spPr>
+          <a:xfrm>
+            <a:off x="8092440" y="1143000"/>
+            <a:ext cx="3794760" cy="2846070"/>
+          </a:xfrm>
+          <a:prstGeom prst="rect">
+            <a:avLst/>
+          </a:prstGeom>
+        </p:spPr>
+      </p:pic>
+      <p:sp>
+        <p:nvSpPr>
+          <p:cNvPr id="6" name="TextBox 5"/>
           <p:cNvSpPr txBox="1"/>
           <p:nvPr/>
         </p:nvSpPr>
         <p:spPr>
           <a:xfrm>
-            <a:off x="731520" y="5989320"/>
-            <a:ext cx="10789920" cy="365760"/>
+            <a:off x="731520" y="6172200"/>
+            <a:ext cx="10789920" cy="320040"/>
           </a:xfrm>
           <a:prstGeom prst="rect">
             <a:avLst/>
@@ -3491,20 +3370,170 @@
           <a:noFill/>
         </p:spPr>
         <p:txBody>
-          <a:bodyPr wrap="none">
-            <a:spAutoFit/>
+          <a:bodyPr wrap="square">
+            <a:normAutofit/>
           </a:bodyPr>
           <a:lstStyle/>
           <a:p>
             <a:pPr algn="ctr">
-              <a:defRPr sz="1500">
-                <a:solidFill>
-                  <a:srgbClr val="22D3EE"/>
-                </a:solidFill>
+              <a:defRPr sz="1400" b="0">
+                <a:solidFill>
+                  <a:srgbClr val="475569"/>
+                </a:solidFill>
+                <a:latin typeface="Aptos"/>
               </a:defRPr>
             </a:pPr>
             <a:r>
-              <a:t>Dashboard supports pasted code, prepared examples, CSV upload and model selection.</a:t>
+              <a:t>Synthetic SVM is strong on template-like labels. Real-data models expose the minority-class problem clearly.</a:t>
+            </a:r>
+          </a:p>
+        </p:txBody>
+      </p:sp>
+    </p:spTree>
+  </p:cSld>
+  <p:clrMapOvr>
+    <a:masterClrMapping/>
+  </p:clrMapOvr>
+</p:sld>
+</file>
+
+<file path=ppt/slides/slide11.xml><?xml version="1.0" encoding="utf-8"?>
+<p:sld xmlns:a="http://schemas.openxmlformats.org/drawingml/2006/main" xmlns:p="http://schemas.openxmlformats.org/presentationml/2006/main" xmlns:r="http://schemas.openxmlformats.org/officeDocument/2006/relationships">
+  <p:cSld>
+    <p:bg>
+      <p:bgPr>
+        <a:solidFill>
+          <a:srgbClr val="F8FAFC"/>
+        </a:solidFill>
+        <a:effectLst/>
+      </p:bgPr>
+    </p:bg>
+    <p:spTree>
+      <p:nvGrpSpPr>
+        <p:cNvPr id="1" name=""/>
+        <p:cNvGrpSpPr/>
+        <p:nvPr/>
+      </p:nvGrpSpPr>
+      <p:grpSpPr/>
+      <p:sp>
+        <p:nvSpPr>
+          <p:cNvPr id="2" name="TextBox 1"/>
+          <p:cNvSpPr txBox="1"/>
+          <p:nvPr/>
+        </p:nvSpPr>
+        <p:spPr>
+          <a:xfrm>
+            <a:off x="502920" y="320040"/>
+            <a:ext cx="11155680" cy="502920"/>
+          </a:xfrm>
+          <a:prstGeom prst="rect">
+            <a:avLst/>
+          </a:prstGeom>
+          <a:noFill/>
+        </p:spPr>
+        <p:txBody>
+          <a:bodyPr wrap="square">
+            <a:normAutofit/>
+          </a:bodyPr>
+          <a:lstStyle/>
+          <a:p>
+            <a:pPr>
+              <a:defRPr sz="2700" b="1">
+                <a:solidFill>
+                  <a:srgbClr val="0F172A"/>
+                </a:solidFill>
+                <a:latin typeface="Aptos"/>
+              </a:defRPr>
+            </a:pPr>
+            <a:r>
+              <a:t>Successful external study: BIFI</a:t>
+            </a:r>
+          </a:p>
+        </p:txBody>
+      </p:sp>
+      <p:sp>
+        <p:nvSpPr>
+          <p:cNvPr id="3" name="TextBox 2"/>
+          <p:cNvSpPr txBox="1"/>
+          <p:nvPr/>
+        </p:nvSpPr>
+        <p:spPr>
+          <a:xfrm>
+            <a:off x="731520" y="1417320"/>
+            <a:ext cx="10789920" cy="4846320"/>
+          </a:xfrm>
+          <a:prstGeom prst="rect">
+            <a:avLst/>
+          </a:prstGeom>
+          <a:noFill/>
+        </p:spPr>
+        <p:txBody>
+          <a:bodyPr wrap="square">
+            <a:normAutofit/>
+          </a:bodyPr>
+          <a:lstStyle/>
+          <a:p>
+            <a:pPr>
+              <a:spcAft>
+                <a:spcPts val="1200"/>
+              </a:spcAft>
+              <a:defRPr sz="2000">
+                <a:solidFill>
+                  <a:srgbClr val="0F172A"/>
+                </a:solidFill>
+                <a:latin typeface="Aptos"/>
+              </a:defRPr>
+            </a:pPr>
+            <a:r>
+              <a:t>Break-It-Fix-It (Yasunaga and Liang, ICML 2021) is a program-repair model, not a classifier.</a:t>
+            </a:r>
+          </a:p>
+          <a:p>
+            <a:pPr>
+              <a:spcAft>
+                <a:spcPts val="1200"/>
+              </a:spcAft>
+              <a:defRPr sz="2000">
+                <a:solidFill>
+                  <a:srgbClr val="0F172A"/>
+                </a:solidFill>
+                <a:latin typeface="Aptos"/>
+              </a:defRPr>
+            </a:pPr>
+            <a:r>
+              <a:t>It uses a parser/compiler-style critic to verify whether generated code is valid.</a:t>
+            </a:r>
+          </a:p>
+          <a:p>
+            <a:pPr>
+              <a:spcAft>
+                <a:spcPts val="1200"/>
+              </a:spcAft>
+              <a:defRPr sz="2000">
+                <a:solidFill>
+                  <a:srgbClr val="0F172A"/>
+                </a:solidFill>
+                <a:latin typeface="Aptos"/>
+              </a:defRPr>
+            </a:pPr>
+            <a:r>
+              <a:t>Reported results: 90.5% repair accuracy on GitHub-Python AST parse errors and 71.7% on DeepFix C.</a:t>
+            </a:r>
+          </a:p>
+          <a:p>
+            <a:pPr>
+              <a:spcAft>
+                <a:spcPts val="1200"/>
+              </a:spcAft>
+              <a:defRPr sz="2000">
+                <a:solidFill>
+                  <a:srgbClr val="0F172A"/>
+                </a:solidFill>
+                <a:latin typeface="Aptos"/>
+              </a:defRPr>
+            </a:pPr>
+            <a:r>
+              <a:t>It directly addresses our key limitation: synthetic errors often do not match real human errors.</a:t>
             </a:r>
           </a:p>
         </p:txBody>
@@ -3523,7 +3552,7 @@
     <p:bg>
       <p:bgPr>
         <a:solidFill>
-          <a:srgbClr val="0C172A"/>
+          <a:srgbClr val="F8FAFC"/>
         </a:solidFill>
         <a:effectLst/>
       </p:bgPr>
@@ -3543,8 +3572,8 @@
         </p:nvSpPr>
         <p:spPr>
           <a:xfrm>
-            <a:off x="640080" y="411480"/>
-            <a:ext cx="10881360" cy="731520"/>
+            <a:off x="502920" y="320040"/>
+            <a:ext cx="11155680" cy="502920"/>
           </a:xfrm>
           <a:prstGeom prst="rect">
             <a:avLst/>
@@ -3552,35 +3581,506 @@
           <a:noFill/>
         </p:spPr>
         <p:txBody>
-          <a:bodyPr wrap="none">
-            <a:spAutoFit/>
+          <a:bodyPr wrap="square">
+            <a:normAutofit/>
           </a:bodyPr>
           <a:lstStyle/>
           <a:p>
             <a:pPr>
-              <a:defRPr sz="2800" b="1">
-                <a:solidFill>
-                  <a:srgbClr val="F1F5F9"/>
-                </a:solidFill>
-                <a:latin typeface="Aptos Display"/>
+              <a:defRPr sz="2700" b="1">
+                <a:solidFill>
+                  <a:srgbClr val="0F172A"/>
+                </a:solidFill>
+                <a:latin typeface="Aptos"/>
               </a:defRPr>
             </a:pPr>
             <a:r>
-              <a:t>Conclusion and next steps</a:t>
-            </a:r>
-          </a:p>
-        </p:txBody>
-      </p:sp>
-      <p:sp>
-        <p:nvSpPr>
-          <p:cNvPr id="3" name="TextBox 2"/>
+              <a:t>Our system compared with BIFI</a:t>
+            </a:r>
+          </a:p>
+        </p:txBody>
+      </p:sp>
+      <p:graphicFrame>
+        <p:nvGraphicFramePr>
+          <p:cNvPr id="3" name="Table 2"/>
+          <p:cNvGraphicFramePr>
+            <a:graphicFrameLocks noGrp="1"/>
+          </p:cNvGraphicFramePr>
+          <p:nvPr/>
+        </p:nvGraphicFramePr>
+        <p:xfrm>
+          <a:off x="548640" y="1325880"/>
+          <a:ext cx="11064240" cy="3749039"/>
+        </p:xfrm>
+        <a:graphic>
+          <a:graphicData uri="http://schemas.openxmlformats.org/drawingml/2006/table">
+            <a:tbl>
+              <a:tblPr firstRow="1" bandRow="1">
+                <a:tableStyleId>{5C22544A-7EE6-4342-B048-85BDC9FD1C3A}</a:tableStyleId>
+              </a:tblPr>
+              <a:tblGrid>
+                <a:gridCol w="3688080"/>
+                <a:gridCol w="3688080"/>
+                <a:gridCol w="3688080"/>
+              </a:tblGrid>
+              <a:tr h="624839">
+                <a:tc>
+                  <a:txBody>
+                    <a:bodyPr/>
+                    <a:lstStyle/>
+                    <a:p>
+                      <a:pPr>
+                        <a:defRPr sz="1200" b="1">
+                          <a:solidFill>
+                            <a:srgbClr val="FFFFFF"/>
+                          </a:solidFill>
+                          <a:latin typeface="Aptos"/>
+                        </a:defRPr>
+                      </a:pPr>
+                      <a:r>
+                        <a:t>Aspect</a:t>
+                      </a:r>
+                    </a:p>
+                  </a:txBody>
+                  <a:tcPr>
+                    <a:solidFill>
+                      <a:srgbClr val="0D9488"/>
+                    </a:solidFill>
+                  </a:tcPr>
+                </a:tc>
+                <a:tc>
+                  <a:txBody>
+                    <a:bodyPr/>
+                    <a:lstStyle/>
+                    <a:p>
+                      <a:pPr>
+                        <a:defRPr sz="1200" b="1">
+                          <a:solidFill>
+                            <a:srgbClr val="FFFFFF"/>
+                          </a:solidFill>
+                          <a:latin typeface="Aptos"/>
+                        </a:defRPr>
+                      </a:pPr>
+                      <a:r>
+                        <a:t>This project</a:t>
+                      </a:r>
+                    </a:p>
+                  </a:txBody>
+                  <a:tcPr>
+                    <a:solidFill>
+                      <a:srgbClr val="0D9488"/>
+                    </a:solidFill>
+                  </a:tcPr>
+                </a:tc>
+                <a:tc>
+                  <a:txBody>
+                    <a:bodyPr/>
+                    <a:lstStyle/>
+                    <a:p>
+                      <a:pPr>
+                        <a:defRPr sz="1200" b="1">
+                          <a:solidFill>
+                            <a:srgbClr val="FFFFFF"/>
+                          </a:solidFill>
+                          <a:latin typeface="Aptos"/>
+                        </a:defRPr>
+                      </a:pPr>
+                      <a:r>
+                        <a:t>BIFI</a:t>
+                      </a:r>
+                    </a:p>
+                  </a:txBody>
+                  <a:tcPr>
+                    <a:solidFill>
+                      <a:srgbClr val="0D9488"/>
+                    </a:solidFill>
+                  </a:tcPr>
+                </a:tc>
+              </a:tr>
+              <a:tr h="624839">
+                <a:tc>
+                  <a:txBody>
+                    <a:bodyPr/>
+                    <a:lstStyle/>
+                    <a:p>
+                      <a:pPr>
+                        <a:defRPr sz="1200" b="0">
+                          <a:solidFill>
+                            <a:srgbClr val="0F172A"/>
+                          </a:solidFill>
+                          <a:latin typeface="Aptos"/>
+                        </a:defRPr>
+                      </a:pPr>
+                      <a:r>
+                        <a:t>Task</a:t>
+                      </a:r>
+                    </a:p>
+                  </a:txBody>
+                  <a:tcPr>
+                    <a:solidFill>
+                      <a:srgbClr val="FFFFFF"/>
+                    </a:solidFill>
+                  </a:tcPr>
+                </a:tc>
+                <a:tc>
+                  <a:txBody>
+                    <a:bodyPr/>
+                    <a:lstStyle/>
+                    <a:p>
+                      <a:pPr>
+                        <a:defRPr sz="1200" b="0">
+                          <a:solidFill>
+                            <a:srgbClr val="0F172A"/>
+                          </a:solidFill>
+                          <a:latin typeface="Aptos"/>
+                        </a:defRPr>
+                      </a:pPr>
+                      <a:r>
+                        <a:t>Error-pattern classification</a:t>
+                      </a:r>
+                    </a:p>
+                  </a:txBody>
+                  <a:tcPr>
+                    <a:solidFill>
+                      <a:srgbClr val="FFFFFF"/>
+                    </a:solidFill>
+                  </a:tcPr>
+                </a:tc>
+                <a:tc>
+                  <a:txBody>
+                    <a:bodyPr/>
+                    <a:lstStyle/>
+                    <a:p>
+                      <a:pPr>
+                        <a:defRPr sz="1200" b="0">
+                          <a:solidFill>
+                            <a:srgbClr val="0F172A"/>
+                          </a:solidFill>
+                          <a:latin typeface="Aptos"/>
+                        </a:defRPr>
+                      </a:pPr>
+                      <a:r>
+                        <a:t>Syntax/compile error repair</a:t>
+                      </a:r>
+                    </a:p>
+                  </a:txBody>
+                  <a:tcPr>
+                    <a:solidFill>
+                      <a:srgbClr val="FFFFFF"/>
+                    </a:solidFill>
+                  </a:tcPr>
+                </a:tc>
+              </a:tr>
+              <a:tr h="624839">
+                <a:tc>
+                  <a:txBody>
+                    <a:bodyPr/>
+                    <a:lstStyle/>
+                    <a:p>
+                      <a:pPr>
+                        <a:defRPr sz="1200" b="0">
+                          <a:solidFill>
+                            <a:srgbClr val="0F172A"/>
+                          </a:solidFill>
+                          <a:latin typeface="Aptos"/>
+                        </a:defRPr>
+                      </a:pPr>
+                      <a:r>
+                        <a:t>Training signal</a:t>
+                      </a:r>
+                    </a:p>
+                  </a:txBody>
+                  <a:tcPr>
+                    <a:solidFill>
+                      <a:srgbClr val="FFFFFF"/>
+                    </a:solidFill>
+                  </a:tcPr>
+                </a:tc>
+                <a:tc>
+                  <a:txBody>
+                    <a:bodyPr/>
+                    <a:lstStyle/>
+                    <a:p>
+                      <a:pPr>
+                        <a:defRPr sz="1100" b="0">
+                          <a:solidFill>
+                            <a:srgbClr val="0F172A"/>
+                          </a:solidFill>
+                          <a:latin typeface="Aptos"/>
+                        </a:defRPr>
+                      </a:pPr>
+                      <a:r>
+                        <a:t>Labels from generated data and AST checks</a:t>
+                      </a:r>
+                    </a:p>
+                  </a:txBody>
+                  <a:tcPr>
+                    <a:solidFill>
+                      <a:srgbClr val="FFFFFF"/>
+                    </a:solidFill>
+                  </a:tcPr>
+                </a:tc>
+                <a:tc>
+                  <a:txBody>
+                    <a:bodyPr/>
+                    <a:lstStyle/>
+                    <a:p>
+                      <a:pPr>
+                        <a:defRPr sz="1100" b="0">
+                          <a:solidFill>
+                            <a:srgbClr val="0F172A"/>
+                          </a:solidFill>
+                          <a:latin typeface="Aptos"/>
+                        </a:defRPr>
+                      </a:pPr>
+                      <a:r>
+                        <a:t>Parser/compiler critic plus generated pairs</a:t>
+                      </a:r>
+                    </a:p>
+                  </a:txBody>
+                  <a:tcPr>
+                    <a:solidFill>
+                      <a:srgbClr val="FFFFFF"/>
+                    </a:solidFill>
+                  </a:tcPr>
+                </a:tc>
+              </a:tr>
+              <a:tr h="624839">
+                <a:tc>
+                  <a:txBody>
+                    <a:bodyPr/>
+                    <a:lstStyle/>
+                    <a:p>
+                      <a:pPr>
+                        <a:defRPr sz="1200" b="0">
+                          <a:solidFill>
+                            <a:srgbClr val="0F172A"/>
+                          </a:solidFill>
+                          <a:latin typeface="Aptos"/>
+                        </a:defRPr>
+                      </a:pPr>
+                      <a:r>
+                        <a:t>Strength</a:t>
+                      </a:r>
+                    </a:p>
+                  </a:txBody>
+                  <a:tcPr>
+                    <a:solidFill>
+                      <a:srgbClr val="FFFFFF"/>
+                    </a:solidFill>
+                  </a:tcPr>
+                </a:tc>
+                <a:tc>
+                  <a:txBody>
+                    <a:bodyPr/>
+                    <a:lstStyle/>
+                    <a:p>
+                      <a:pPr>
+                        <a:defRPr sz="1100" b="0">
+                          <a:solidFill>
+                            <a:srgbClr val="0F172A"/>
+                          </a:solidFill>
+                          <a:latin typeface="Aptos"/>
+                        </a:defRPr>
+                      </a:pPr>
+                      <a:r>
+                        <a:t>End-to-end PR pipeline and dashboard</a:t>
+                      </a:r>
+                    </a:p>
+                  </a:txBody>
+                  <a:tcPr>
+                    <a:solidFill>
+                      <a:srgbClr val="FFFFFF"/>
+                    </a:solidFill>
+                  </a:tcPr>
+                </a:tc>
+                <a:tc>
+                  <a:txBody>
+                    <a:bodyPr/>
+                    <a:lstStyle/>
+                    <a:p>
+                      <a:pPr>
+                        <a:defRPr sz="1100" b="0">
+                          <a:solidFill>
+                            <a:srgbClr val="0F172A"/>
+                          </a:solidFill>
+                          <a:latin typeface="Aptos"/>
+                        </a:defRPr>
+                      </a:pPr>
+                      <a:r>
+                        <a:t>High repair accuracy with real-error adaptation</a:t>
+                      </a:r>
+                    </a:p>
+                  </a:txBody>
+                  <a:tcPr>
+                    <a:solidFill>
+                      <a:srgbClr val="FFFFFF"/>
+                    </a:solidFill>
+                  </a:tcPr>
+                </a:tc>
+              </a:tr>
+              <a:tr h="624839">
+                <a:tc>
+                  <a:txBody>
+                    <a:bodyPr/>
+                    <a:lstStyle/>
+                    <a:p>
+                      <a:pPr>
+                        <a:defRPr sz="1200" b="0">
+                          <a:solidFill>
+                            <a:srgbClr val="0F172A"/>
+                          </a:solidFill>
+                          <a:latin typeface="Aptos"/>
+                        </a:defRPr>
+                      </a:pPr>
+                      <a:r>
+                        <a:t>Requirement</a:t>
+                      </a:r>
+                    </a:p>
+                  </a:txBody>
+                  <a:tcPr>
+                    <a:solidFill>
+                      <a:srgbClr val="FFFFFF"/>
+                    </a:solidFill>
+                  </a:tcPr>
+                </a:tc>
+                <a:tc>
+                  <a:txBody>
+                    <a:bodyPr/>
+                    <a:lstStyle/>
+                    <a:p>
+                      <a:pPr>
+                        <a:defRPr sz="1100" b="0">
+                          <a:solidFill>
+                            <a:srgbClr val="0F172A"/>
+                          </a:solidFill>
+                          <a:latin typeface="Aptos"/>
+                        </a:defRPr>
+                      </a:pPr>
+                      <a:r>
+                        <a:t>Labeled examples and class balance</a:t>
+                      </a:r>
+                    </a:p>
+                  </a:txBody>
+                  <a:tcPr>
+                    <a:solidFill>
+                      <a:srgbClr val="FFFFFF"/>
+                    </a:solidFill>
+                  </a:tcPr>
+                </a:tc>
+                <a:tc>
+                  <a:txBody>
+                    <a:bodyPr/>
+                    <a:lstStyle/>
+                    <a:p>
+                      <a:pPr>
+                        <a:defRPr sz="1100" b="0">
+                          <a:solidFill>
+                            <a:srgbClr val="0F172A"/>
+                          </a:solidFill>
+                          <a:latin typeface="Aptos"/>
+                        </a:defRPr>
+                      </a:pPr>
+                      <a:r>
+                        <a:t>Large corpora, critic, more compute</a:t>
+                      </a:r>
+                    </a:p>
+                  </a:txBody>
+                  <a:tcPr>
+                    <a:solidFill>
+                      <a:srgbClr val="FFFFFF"/>
+                    </a:solidFill>
+                  </a:tcPr>
+                </a:tc>
+              </a:tr>
+              <a:tr h="624844">
+                <a:tc>
+                  <a:txBody>
+                    <a:bodyPr/>
+                    <a:lstStyle/>
+                    <a:p>
+                      <a:pPr>
+                        <a:defRPr sz="1200" b="0">
+                          <a:solidFill>
+                            <a:srgbClr val="0F172A"/>
+                          </a:solidFill>
+                          <a:latin typeface="Aptos"/>
+                        </a:defRPr>
+                      </a:pPr>
+                      <a:r>
+                        <a:t>Limitation</a:t>
+                      </a:r>
+                    </a:p>
+                  </a:txBody>
+                  <a:tcPr>
+                    <a:solidFill>
+                      <a:srgbClr val="FFFFFF"/>
+                    </a:solidFill>
+                  </a:tcPr>
+                </a:tc>
+                <a:tc>
+                  <a:txBody>
+                    <a:bodyPr/>
+                    <a:lstStyle/>
+                    <a:p>
+                      <a:pPr>
+                        <a:defRPr sz="1100" b="0">
+                          <a:solidFill>
+                            <a:srgbClr val="0F172A"/>
+                          </a:solidFill>
+                          <a:latin typeface="Aptos"/>
+                        </a:defRPr>
+                      </a:pPr>
+                      <a:r>
+                        <a:t>Low precision on real syntax errors</a:t>
+                      </a:r>
+                    </a:p>
+                  </a:txBody>
+                  <a:tcPr>
+                    <a:solidFill>
+                      <a:srgbClr val="FFFFFF"/>
+                    </a:solidFill>
+                  </a:tcPr>
+                </a:tc>
+                <a:tc>
+                  <a:txBody>
+                    <a:bodyPr/>
+                    <a:lstStyle/>
+                    <a:p>
+                      <a:pPr>
+                        <a:defRPr sz="1100" b="0">
+                          <a:solidFill>
+                            <a:srgbClr val="0F172A"/>
+                          </a:solidFill>
+                          <a:latin typeface="Aptos"/>
+                        </a:defRPr>
+                      </a:pPr>
+                      <a:r>
+                        <a:t>Does not solve semantic bugs without stronger feedback</a:t>
+                      </a:r>
+                    </a:p>
+                  </a:txBody>
+                  <a:tcPr>
+                    <a:solidFill>
+                      <a:srgbClr val="FFFFFF"/>
+                    </a:solidFill>
+                  </a:tcPr>
+                </a:tc>
+              </a:tr>
+            </a:tbl>
+          </a:graphicData>
+        </a:graphic>
+      </p:graphicFrame>
+      <p:sp>
+        <p:nvSpPr>
+          <p:cNvPr id="4" name="TextBox 3"/>
           <p:cNvSpPr txBox="1"/>
           <p:nvPr/>
         </p:nvSpPr>
         <p:spPr>
           <a:xfrm>
-            <a:off x="822960" y="1508760"/>
-            <a:ext cx="10424160" cy="4663440"/>
+            <a:off x="822960" y="5715000"/>
+            <a:ext cx="10607040" cy="457200"/>
           </a:xfrm>
           <a:prstGeom prst="rect">
             <a:avLst/>
@@ -3588,72 +4088,649 @@
           <a:noFill/>
         </p:spPr>
         <p:txBody>
-          <a:bodyPr wrap="none">
-            <a:spAutoFit/>
+          <a:bodyPr wrap="square">
+            <a:normAutofit/>
+          </a:bodyPr>
+          <a:lstStyle/>
+          <a:p>
+            <a:pPr algn="ctr">
+              <a:defRPr sz="1700" b="1">
+                <a:solidFill>
+                  <a:srgbClr val="D97706"/>
+                </a:solidFill>
+                <a:latin typeface="Aptos"/>
+              </a:defRPr>
+            </a:pPr>
+            <a:r>
+              <a:t>Future direction: use parser and unit-test feedback to move from static labels toward verified behavior.</a:t>
+            </a:r>
+          </a:p>
+        </p:txBody>
+      </p:sp>
+    </p:spTree>
+  </p:cSld>
+  <p:clrMapOvr>
+    <a:masterClrMapping/>
+  </p:clrMapOvr>
+</p:sld>
+</file>
+
+<file path=ppt/slides/slide13.xml><?xml version="1.0" encoding="utf-8"?>
+<p:sld xmlns:a="http://schemas.openxmlformats.org/drawingml/2006/main" xmlns:p="http://schemas.openxmlformats.org/presentationml/2006/main" xmlns:r="http://schemas.openxmlformats.org/officeDocument/2006/relationships">
+  <p:cSld>
+    <p:bg>
+      <p:bgPr>
+        <a:solidFill>
+          <a:srgbClr val="F8FAFC"/>
+        </a:solidFill>
+        <a:effectLst/>
+      </p:bgPr>
+    </p:bg>
+    <p:spTree>
+      <p:nvGrpSpPr>
+        <p:cNvPr id="1" name=""/>
+        <p:cNvGrpSpPr/>
+        <p:nvPr/>
+      </p:nvGrpSpPr>
+      <p:grpSpPr/>
+      <p:sp>
+        <p:nvSpPr>
+          <p:cNvPr id="2" name="TextBox 1"/>
+          <p:cNvSpPr txBox="1"/>
+          <p:nvPr/>
+        </p:nvSpPr>
+        <p:spPr>
+          <a:xfrm>
+            <a:off x="502920" y="320040"/>
+            <a:ext cx="11155680" cy="502920"/>
+          </a:xfrm>
+          <a:prstGeom prst="rect">
+            <a:avLst/>
+          </a:prstGeom>
+          <a:noFill/>
+        </p:spPr>
+        <p:txBody>
+          <a:bodyPr wrap="square">
+            <a:normAutofit/>
+          </a:bodyPr>
+          <a:lstStyle/>
+          <a:p>
+            <a:pPr>
+              <a:defRPr sz="2700" b="1">
+                <a:solidFill>
+                  <a:srgbClr val="0F172A"/>
+                </a:solidFill>
+                <a:latin typeface="Aptos"/>
+              </a:defRPr>
+            </a:pPr>
+            <a:r>
+              <a:t>Project achievements</a:t>
+            </a:r>
+          </a:p>
+        </p:txBody>
+      </p:sp>
+      <p:sp>
+        <p:nvSpPr>
+          <p:cNvPr id="3" name="TextBox 2"/>
+          <p:cNvSpPr txBox="1"/>
+          <p:nvPr/>
+        </p:nvSpPr>
+        <p:spPr>
+          <a:xfrm>
+            <a:off x="731520" y="1417320"/>
+            <a:ext cx="10789920" cy="4846320"/>
+          </a:xfrm>
+          <a:prstGeom prst="rect">
+            <a:avLst/>
+          </a:prstGeom>
+          <a:noFill/>
+        </p:spPr>
+        <p:txBody>
+          <a:bodyPr wrap="square">
+            <a:normAutofit/>
           </a:bodyPr>
           <a:lstStyle/>
           <a:p>
             <a:pPr>
               <a:spcAft>
-                <a:spcPts val="1700"/>
+                <a:spcPts val="1200"/>
               </a:spcAft>
-              <a:defRPr sz="2100">
-                <a:solidFill>
-                  <a:srgbClr val="F1F5F9"/>
+              <a:defRPr sz="2000">
+                <a:solidFill>
+                  <a:srgbClr val="0F172A"/>
                 </a:solidFill>
                 <a:latin typeface="Aptos"/>
               </a:defRPr>
             </a:pPr>
             <a:r>
-              <a:t>The end-to-end pipeline is reproducible and leakage-aware.</a:t>
+              <a:t>Built a reproducible package, scripts, tests, experiment artifacts and dashboard.</a:t>
             </a:r>
           </a:p>
           <a:p>
             <a:pPr>
               <a:spcAft>
-                <a:spcPts val="1700"/>
+                <a:spcPts val="1200"/>
               </a:spcAft>
-              <a:defRPr sz="2100">
-                <a:solidFill>
-                  <a:srgbClr val="F1F5F9"/>
+              <a:defRPr sz="2000">
+                <a:solidFill>
+                  <a:srgbClr val="0F172A"/>
                 </a:solidFill>
                 <a:latin typeface="Aptos"/>
               </a:defRPr>
             </a:pPr>
             <a:r>
-              <a:t>Strong synthetic performance demonstrates feasibility, not classroom validity.</a:t>
+              <a:t>Measured a strong synthetic baseline: SVM Macro F1 0.903 on eight labels.</a:t>
             </a:r>
           </a:p>
           <a:p>
             <a:pPr>
               <a:spcAft>
-                <a:spcPts val="1700"/>
+                <a:spcPts val="1200"/>
               </a:spcAft>
-              <a:defRPr sz="2100">
-                <a:solidFill>
-                  <a:srgbClr val="F1F5F9"/>
+              <a:defRPr sz="2000">
+                <a:solidFill>
+                  <a:srgbClr val="0F172A"/>
                 </a:solidFill>
                 <a:latin typeface="Aptos"/>
               </a:defRPr>
             </a:pPr>
             <a:r>
-              <a:t>Real validation exposes severe imbalance and weak syntax-error precision.</a:t>
+              <a:t>Ran real external validation on CodeContests instead of relying only on generated data.</a:t>
             </a:r>
           </a:p>
           <a:p>
             <a:pPr>
               <a:spcAft>
-                <a:spcPts val="1700"/>
+                <a:spcPts val="1200"/>
               </a:spcAft>
-              <a:defRPr sz="2100">
-                <a:solidFill>
-                  <a:srgbClr val="F1F5F9"/>
+              <a:defRPr sz="2000">
+                <a:solidFill>
+                  <a:srgbClr val="0F172A"/>
                 </a:solidFill>
                 <a:latin typeface="Aptos"/>
               </a:defRPr>
             </a:pPr>
             <a:r>
-              <a:t>Next: finish Colab runs and collect expert-annotated student submissions.</a:t>
+              <a:t>Showed that CodeBERT can improve syntax-error recall, but not precision under imbalance.</a:t>
+            </a:r>
+          </a:p>
+          <a:p>
+            <a:pPr>
+              <a:spcAft>
+                <a:spcPts val="1200"/>
+              </a:spcAft>
+              <a:defRPr sz="2000">
+                <a:solidFill>
+                  <a:srgbClr val="0F172A"/>
+                </a:solidFill>
+                <a:latin typeface="Aptos"/>
+              </a:defRPr>
+            </a:pPr>
+            <a:r>
+              <a:t>Added a research comparison explaining what a successful model needs.</a:t>
+            </a:r>
+          </a:p>
+        </p:txBody>
+      </p:sp>
+    </p:spTree>
+  </p:cSld>
+  <p:clrMapOvr>
+    <a:masterClrMapping/>
+  </p:clrMapOvr>
+</p:sld>
+</file>
+
+<file path=ppt/slides/slide14.xml><?xml version="1.0" encoding="utf-8"?>
+<p:sld xmlns:a="http://schemas.openxmlformats.org/drawingml/2006/main" xmlns:p="http://schemas.openxmlformats.org/presentationml/2006/main" xmlns:r="http://schemas.openxmlformats.org/officeDocument/2006/relationships">
+  <p:cSld>
+    <p:bg>
+      <p:bgPr>
+        <a:solidFill>
+          <a:srgbClr val="F8FAFC"/>
+        </a:solidFill>
+        <a:effectLst/>
+      </p:bgPr>
+    </p:bg>
+    <p:spTree>
+      <p:nvGrpSpPr>
+        <p:cNvPr id="1" name=""/>
+        <p:cNvGrpSpPr/>
+        <p:nvPr/>
+      </p:nvGrpSpPr>
+      <p:grpSpPr/>
+      <p:sp>
+        <p:nvSpPr>
+          <p:cNvPr id="2" name="TextBox 1"/>
+          <p:cNvSpPr txBox="1"/>
+          <p:nvPr/>
+        </p:nvSpPr>
+        <p:spPr>
+          <a:xfrm>
+            <a:off x="502920" y="320040"/>
+            <a:ext cx="11155680" cy="502920"/>
+          </a:xfrm>
+          <a:prstGeom prst="rect">
+            <a:avLst/>
+          </a:prstGeom>
+          <a:noFill/>
+        </p:spPr>
+        <p:txBody>
+          <a:bodyPr wrap="square">
+            <a:normAutofit/>
+          </a:bodyPr>
+          <a:lstStyle/>
+          <a:p>
+            <a:pPr>
+              <a:defRPr sz="2700" b="1">
+                <a:solidFill>
+                  <a:srgbClr val="0F172A"/>
+                </a:solidFill>
+                <a:latin typeface="Aptos"/>
+              </a:defRPr>
+            </a:pPr>
+            <a:r>
+              <a:t>Limitations</a:t>
+            </a:r>
+          </a:p>
+        </p:txBody>
+      </p:sp>
+      <p:sp>
+        <p:nvSpPr>
+          <p:cNvPr id="3" name="TextBox 2"/>
+          <p:cNvSpPr txBox="1"/>
+          <p:nvPr/>
+        </p:nvSpPr>
+        <p:spPr>
+          <a:xfrm>
+            <a:off x="731520" y="1417320"/>
+            <a:ext cx="10789920" cy="4846320"/>
+          </a:xfrm>
+          <a:prstGeom prst="rect">
+            <a:avLst/>
+          </a:prstGeom>
+          <a:noFill/>
+        </p:spPr>
+        <p:txBody>
+          <a:bodyPr wrap="square">
+            <a:normAutofit/>
+          </a:bodyPr>
+          <a:lstStyle/>
+          <a:p>
+            <a:pPr>
+              <a:spcAft>
+                <a:spcPts val="1200"/>
+              </a:spcAft>
+              <a:defRPr sz="2000">
+                <a:solidFill>
+                  <a:srgbClr val="0F172A"/>
+                </a:solidFill>
+                <a:latin typeface="Aptos"/>
+              </a:defRPr>
+            </a:pPr>
+            <a:r>
+              <a:t>Synthetic eight-class labels demonstrate feasibility but not classroom generalization.</a:t>
+            </a:r>
+          </a:p>
+          <a:p>
+            <a:pPr>
+              <a:spcAft>
+                <a:spcPts val="1200"/>
+              </a:spcAft>
+              <a:defRPr sz="2000">
+                <a:solidFill>
+                  <a:srgbClr val="0F172A"/>
+                </a:solidFill>
+                <a:latin typeface="Aptos"/>
+              </a:defRPr>
+            </a:pPr>
+            <a:r>
+              <a:t>CodeContests is competitive-programming data, not a classroom dataset.</a:t>
+            </a:r>
+          </a:p>
+          <a:p>
+            <a:pPr>
+              <a:spcAft>
+                <a:spcPts val="1200"/>
+              </a:spcAft>
+              <a:defRPr sz="2000">
+                <a:solidFill>
+                  <a:srgbClr val="0F172A"/>
+                </a:solidFill>
+                <a:latin typeface="Aptos"/>
+              </a:defRPr>
+            </a:pPr>
+            <a:r>
+              <a:t>Real semantic labels are unavailable; parseable incorrect submissions are excluded.</a:t>
+            </a:r>
+          </a:p>
+          <a:p>
+            <a:pPr>
+              <a:spcAft>
+                <a:spcPts val="1200"/>
+              </a:spcAft>
+              <a:defRPr sz="2000">
+                <a:solidFill>
+                  <a:srgbClr val="0F172A"/>
+                </a:solidFill>
+                <a:latin typeface="Aptos"/>
+              </a:defRPr>
+            </a:pPr>
+            <a:r>
+              <a:t>The current task is single-label, while real code can contain multiple errors.</a:t>
+            </a:r>
+          </a:p>
+          <a:p>
+            <a:pPr>
+              <a:spcAft>
+                <a:spcPts val="1200"/>
+              </a:spcAft>
+              <a:defRPr sz="2000">
+                <a:solidFill>
+                  <a:srgbClr val="0F172A"/>
+                </a:solidFill>
+                <a:latin typeface="Aptos"/>
+              </a:defRPr>
+            </a:pPr>
+            <a:r>
+              <a:t>A reliable production model needs expert annotation or test-based behavioral labels.</a:t>
+            </a:r>
+          </a:p>
+        </p:txBody>
+      </p:sp>
+    </p:spTree>
+  </p:cSld>
+  <p:clrMapOvr>
+    <a:masterClrMapping/>
+  </p:clrMapOvr>
+</p:sld>
+</file>
+
+<file path=ppt/slides/slide15.xml><?xml version="1.0" encoding="utf-8"?>
+<p:sld xmlns:a="http://schemas.openxmlformats.org/drawingml/2006/main" xmlns:p="http://schemas.openxmlformats.org/presentationml/2006/main" xmlns:r="http://schemas.openxmlformats.org/officeDocument/2006/relationships">
+  <p:cSld>
+    <p:bg>
+      <p:bgPr>
+        <a:solidFill>
+          <a:srgbClr val="F8FAFC"/>
+        </a:solidFill>
+        <a:effectLst/>
+      </p:bgPr>
+    </p:bg>
+    <p:spTree>
+      <p:nvGrpSpPr>
+        <p:cNvPr id="1" name=""/>
+        <p:cNvGrpSpPr/>
+        <p:nvPr/>
+      </p:nvGrpSpPr>
+      <p:grpSpPr/>
+      <p:sp>
+        <p:nvSpPr>
+          <p:cNvPr id="2" name="TextBox 1"/>
+          <p:cNvSpPr txBox="1"/>
+          <p:nvPr/>
+        </p:nvSpPr>
+        <p:spPr>
+          <a:xfrm>
+            <a:off x="502920" y="320040"/>
+            <a:ext cx="11155680" cy="502920"/>
+          </a:xfrm>
+          <a:prstGeom prst="rect">
+            <a:avLst/>
+          </a:prstGeom>
+          <a:noFill/>
+        </p:spPr>
+        <p:txBody>
+          <a:bodyPr wrap="square">
+            <a:normAutofit/>
+          </a:bodyPr>
+          <a:lstStyle/>
+          <a:p>
+            <a:pPr>
+              <a:defRPr sz="2700" b="1">
+                <a:solidFill>
+                  <a:srgbClr val="0F172A"/>
+                </a:solidFill>
+                <a:latin typeface="Aptos"/>
+              </a:defRPr>
+            </a:pPr>
+            <a:r>
+              <a:t>Conclusion</a:t>
+            </a:r>
+          </a:p>
+        </p:txBody>
+      </p:sp>
+      <p:sp>
+        <p:nvSpPr>
+          <p:cNvPr id="3" name="TextBox 2"/>
+          <p:cNvSpPr txBox="1"/>
+          <p:nvPr/>
+        </p:nvSpPr>
+        <p:spPr>
+          <a:xfrm>
+            <a:off x="731520" y="1417320"/>
+            <a:ext cx="10789920" cy="4846320"/>
+          </a:xfrm>
+          <a:prstGeom prst="rect">
+            <a:avLst/>
+          </a:prstGeom>
+          <a:noFill/>
+        </p:spPr>
+        <p:txBody>
+          <a:bodyPr wrap="square">
+            <a:normAutofit/>
+          </a:bodyPr>
+          <a:lstStyle/>
+          <a:p>
+            <a:pPr>
+              <a:spcAft>
+                <a:spcPts val="1200"/>
+              </a:spcAft>
+              <a:defRPr sz="2000">
+                <a:solidFill>
+                  <a:srgbClr val="0F172A"/>
+                </a:solidFill>
+                <a:latin typeface="Aptos"/>
+              </a:defRPr>
+            </a:pPr>
+            <a:r>
+              <a:t>The project achieved a complete PR workflow for programming-error pattern recognition.</a:t>
+            </a:r>
+          </a:p>
+          <a:p>
+            <a:pPr>
+              <a:spcAft>
+                <a:spcPts val="1200"/>
+              </a:spcAft>
+              <a:defRPr sz="2000">
+                <a:solidFill>
+                  <a:srgbClr val="0F172A"/>
+                </a:solidFill>
+                <a:latin typeface="Aptos"/>
+              </a:defRPr>
+            </a:pPr>
+            <a:r>
+              <a:t>The synthetic task shows the pipeline can learn the proposed taxonomy.</a:t>
+            </a:r>
+          </a:p>
+          <a:p>
+            <a:pPr>
+              <a:spcAft>
+                <a:spcPts val="1200"/>
+              </a:spcAft>
+              <a:defRPr sz="2000">
+                <a:solidFill>
+                  <a:srgbClr val="0F172A"/>
+                </a:solidFill>
+                <a:latin typeface="Aptos"/>
+              </a:defRPr>
+            </a:pPr>
+            <a:r>
+              <a:t>The real-data task shows why accuracy alone is misleading under severe imbalance.</a:t>
+            </a:r>
+          </a:p>
+          <a:p>
+            <a:pPr>
+              <a:spcAft>
+                <a:spcPts val="1200"/>
+              </a:spcAft>
+              <a:defRPr sz="2000">
+                <a:solidFill>
+                  <a:srgbClr val="0F172A"/>
+                </a:solidFill>
+                <a:latin typeface="Aptos"/>
+              </a:defRPr>
+            </a:pPr>
+            <a:r>
+              <a:t>BIFI shows the next step: combine large data with parser/compiler or test feedback.</a:t>
+            </a:r>
+          </a:p>
+        </p:txBody>
+      </p:sp>
+    </p:spTree>
+  </p:cSld>
+  <p:clrMapOvr>
+    <a:masterClrMapping/>
+  </p:clrMapOvr>
+</p:sld>
+</file>
+
+<file path=ppt/slides/slide16.xml><?xml version="1.0" encoding="utf-8"?>
+<p:sld xmlns:a="http://schemas.openxmlformats.org/drawingml/2006/main" xmlns:p="http://schemas.openxmlformats.org/presentationml/2006/main" xmlns:r="http://schemas.openxmlformats.org/officeDocument/2006/relationships">
+  <p:cSld>
+    <p:bg>
+      <p:bgPr>
+        <a:solidFill>
+          <a:srgbClr val="F8FAFC"/>
+        </a:solidFill>
+        <a:effectLst/>
+      </p:bgPr>
+    </p:bg>
+    <p:spTree>
+      <p:nvGrpSpPr>
+        <p:cNvPr id="1" name=""/>
+        <p:cNvGrpSpPr/>
+        <p:nvPr/>
+      </p:nvGrpSpPr>
+      <p:grpSpPr/>
+      <p:sp>
+        <p:nvSpPr>
+          <p:cNvPr id="2" name="TextBox 1"/>
+          <p:cNvSpPr txBox="1"/>
+          <p:nvPr/>
+        </p:nvSpPr>
+        <p:spPr>
+          <a:xfrm>
+            <a:off x="502920" y="320040"/>
+            <a:ext cx="11155680" cy="502920"/>
+          </a:xfrm>
+          <a:prstGeom prst="rect">
+            <a:avLst/>
+          </a:prstGeom>
+          <a:noFill/>
+        </p:spPr>
+        <p:txBody>
+          <a:bodyPr wrap="square">
+            <a:normAutofit/>
+          </a:bodyPr>
+          <a:lstStyle/>
+          <a:p>
+            <a:pPr>
+              <a:defRPr sz="2700" b="1">
+                <a:solidFill>
+                  <a:srgbClr val="0F172A"/>
+                </a:solidFill>
+                <a:latin typeface="Aptos"/>
+              </a:defRPr>
+            </a:pPr>
+            <a:r>
+              <a:t>References</a:t>
+            </a:r>
+          </a:p>
+        </p:txBody>
+      </p:sp>
+      <p:sp>
+        <p:nvSpPr>
+          <p:cNvPr id="3" name="TextBox 2"/>
+          <p:cNvSpPr txBox="1"/>
+          <p:nvPr/>
+        </p:nvSpPr>
+        <p:spPr>
+          <a:xfrm>
+            <a:off x="731520" y="1417320"/>
+            <a:ext cx="10789920" cy="4846320"/>
+          </a:xfrm>
+          <a:prstGeom prst="rect">
+            <a:avLst/>
+          </a:prstGeom>
+          <a:noFill/>
+        </p:spPr>
+        <p:txBody>
+          <a:bodyPr wrap="square">
+            <a:normAutofit/>
+          </a:bodyPr>
+          <a:lstStyle/>
+          <a:p>
+            <a:pPr>
+              <a:spcAft>
+                <a:spcPts val="1200"/>
+              </a:spcAft>
+              <a:defRPr sz="2000">
+                <a:solidFill>
+                  <a:srgbClr val="0F172A"/>
+                </a:solidFill>
+                <a:latin typeface="Aptos"/>
+              </a:defRPr>
+            </a:pPr>
+            <a:r>
+              <a:t>Yasunaga and Liang, Break-It-Fix-It: Unsupervised Learning for Program Repair, ICML 2021.</a:t>
+            </a:r>
+          </a:p>
+          <a:p>
+            <a:pPr>
+              <a:spcAft>
+                <a:spcPts val="1200"/>
+              </a:spcAft>
+              <a:defRPr sz="2000">
+                <a:solidFill>
+                  <a:srgbClr val="0F172A"/>
+                </a:solidFill>
+                <a:latin typeface="Aptos"/>
+              </a:defRPr>
+            </a:pPr>
+            <a:r>
+              <a:t>Yasunaga and Liang, Graph-based, Self-Supervised Program Repair from Diagnostic Feedback, ICML 2020.</a:t>
+            </a:r>
+          </a:p>
+          <a:p>
+            <a:pPr>
+              <a:spcAft>
+                <a:spcPts val="1200"/>
+              </a:spcAft>
+              <a:defRPr sz="2000">
+                <a:solidFill>
+                  <a:srgbClr val="0F172A"/>
+                </a:solidFill>
+                <a:latin typeface="Aptos"/>
+              </a:defRPr>
+            </a:pPr>
+            <a:r>
+              <a:t>DeepMind CodeContests dataset for real competitive-programming submissions.</a:t>
+            </a:r>
+          </a:p>
+          <a:p>
+            <a:pPr>
+              <a:spcAft>
+                <a:spcPts val="1200"/>
+              </a:spcAft>
+              <a:defRPr sz="2000">
+                <a:solidFill>
+                  <a:srgbClr val="0F172A"/>
+                </a:solidFill>
+                <a:latin typeface="Aptos"/>
+              </a:defRPr>
+            </a:pPr>
+            <a:r>
+              <a:t>Microsoft CodeBERT for transformer-based source-code representation.</a:t>
             </a:r>
           </a:p>
         </p:txBody>
@@ -3672,7 +4749,7 @@
     <p:bg>
       <p:bgPr>
         <a:solidFill>
-          <a:srgbClr val="0C172A"/>
+          <a:srgbClr val="F8FAFC"/>
         </a:solidFill>
         <a:effectLst/>
       </p:bgPr>
@@ -3692,8 +4769,8 @@
         </p:nvSpPr>
         <p:spPr>
           <a:xfrm>
-            <a:off x="640080" y="411480"/>
-            <a:ext cx="10881360" cy="731520"/>
+            <a:off x="502920" y="320040"/>
+            <a:ext cx="11155680" cy="502920"/>
           </a:xfrm>
           <a:prstGeom prst="rect">
             <a:avLst/>
@@ -3701,21 +4778,21 @@
           <a:noFill/>
         </p:spPr>
         <p:txBody>
-          <a:bodyPr wrap="none">
-            <a:spAutoFit/>
+          <a:bodyPr wrap="square">
+            <a:normAutofit/>
           </a:bodyPr>
           <a:lstStyle/>
           <a:p>
             <a:pPr>
-              <a:defRPr sz="2800" b="1">
-                <a:solidFill>
-                  <a:srgbClr val="F1F5F9"/>
-                </a:solidFill>
-                <a:latin typeface="Aptos Display"/>
+              <a:defRPr sz="2700" b="1">
+                <a:solidFill>
+                  <a:srgbClr val="0F172A"/>
+                </a:solidFill>
+                <a:latin typeface="Aptos"/>
               </a:defRPr>
             </a:pPr>
             <a:r>
-              <a:t>Why this problem matters</a:t>
+              <a:t>Project goal and PR framing</a:t>
             </a:r>
           </a:p>
         </p:txBody>
@@ -3728,8 +4805,8 @@
         </p:nvSpPr>
         <p:spPr>
           <a:xfrm>
-            <a:off x="822960" y="1508760"/>
-            <a:ext cx="10424160" cy="4663440"/>
+            <a:off x="731520" y="1417320"/>
+            <a:ext cx="10789920" cy="4846320"/>
           </a:xfrm>
           <a:prstGeom prst="rect">
             <a:avLst/>
@@ -3737,56 +4814,72 @@
           <a:noFill/>
         </p:spPr>
         <p:txBody>
-          <a:bodyPr wrap="none">
-            <a:spAutoFit/>
+          <a:bodyPr wrap="square">
+            <a:normAutofit/>
           </a:bodyPr>
           <a:lstStyle/>
           <a:p>
             <a:pPr>
               <a:spcAft>
-                <a:spcPts val="1700"/>
+                <a:spcPts val="1200"/>
               </a:spcAft>
-              <a:defRPr sz="2100">
-                <a:solidFill>
-                  <a:srgbClr val="F1F5F9"/>
+              <a:defRPr sz="2000">
+                <a:solidFill>
+                  <a:srgbClr val="0F172A"/>
                 </a:solidFill>
                 <a:latin typeface="Aptos"/>
               </a:defRPr>
             </a:pPr>
             <a:r>
-              <a:t>Programming courses receive many submissions with recurring mistakes.</a:t>
+              <a:t>Input: a Python code submission.</a:t>
             </a:r>
           </a:p>
           <a:p>
             <a:pPr>
               <a:spcAft>
-                <a:spcPts val="1700"/>
+                <a:spcPts val="1200"/>
               </a:spcAft>
-              <a:defRPr sz="2100">
-                <a:solidFill>
-                  <a:srgbClr val="F1F5F9"/>
+              <a:defRPr sz="2000">
+                <a:solidFill>
+                  <a:srgbClr val="0F172A"/>
                 </a:solidFill>
                 <a:latin typeface="Aptos"/>
               </a:defRPr>
             </a:pPr>
             <a:r>
-              <a:t>Automated triage can help instructors prioritize review and feedback.</a:t>
+              <a:t>Output: an error-pattern label or a correct-solution label.</a:t>
             </a:r>
           </a:p>
           <a:p>
             <a:pPr>
               <a:spcAft>
-                <a:spcPts val="1700"/>
+                <a:spcPts val="1200"/>
               </a:spcAft>
-              <a:defRPr sz="2100">
-                <a:solidFill>
-                  <a:srgbClr val="F1F5F9"/>
+              <a:defRPr sz="2000">
+                <a:solidFill>
+                  <a:srgbClr val="0F172A"/>
                 </a:solidFill>
                 <a:latin typeface="Aptos"/>
               </a:defRPr>
             </a:pPr>
             <a:r>
-              <a:t>The model supports human review; it does not replace an instructor.</a:t>
+              <a:t>Pattern recognition task: represent source code, train classifiers, evaluate generalization.</a:t>
+            </a:r>
+          </a:p>
+          <a:p>
+            <a:pPr>
+              <a:spcAft>
+                <a:spcPts val="1200"/>
+              </a:spcAft>
+              <a:defRPr sz="2000">
+                <a:solidFill>
+                  <a:srgbClr val="0F172A"/>
+                </a:solidFill>
+                <a:latin typeface="Aptos"/>
+              </a:defRPr>
+            </a:pPr>
+            <a:r>
+              <a:t>Practical value: summarize recurring mistakes and support instructor triage.</a:t>
             </a:r>
           </a:p>
         </p:txBody>
@@ -3805,7 +4898,7 @@
     <p:bg>
       <p:bgPr>
         <a:solidFill>
-          <a:srgbClr val="0C172A"/>
+          <a:srgbClr val="F8FAFC"/>
         </a:solidFill>
         <a:effectLst/>
       </p:bgPr>
@@ -3825,8 +4918,8 @@
         </p:nvSpPr>
         <p:spPr>
           <a:xfrm>
-            <a:off x="640080" y="411480"/>
-            <a:ext cx="10881360" cy="731520"/>
+            <a:off x="502920" y="320040"/>
+            <a:ext cx="11155680" cy="502920"/>
           </a:xfrm>
           <a:prstGeom prst="rect">
             <a:avLst/>
@@ -3834,21 +4927,21 @@
           <a:noFill/>
         </p:spPr>
         <p:txBody>
-          <a:bodyPr wrap="none">
-            <a:spAutoFit/>
+          <a:bodyPr wrap="square">
+            <a:normAutofit/>
           </a:bodyPr>
           <a:lstStyle/>
           <a:p>
             <a:pPr>
-              <a:defRPr sz="2800" b="1">
-                <a:solidFill>
-                  <a:srgbClr val="F1F5F9"/>
-                </a:solidFill>
-                <a:latin typeface="Aptos Display"/>
+              <a:defRPr sz="2700" b="1">
+                <a:solidFill>
+                  <a:srgbClr val="0F172A"/>
+                </a:solidFill>
+                <a:latin typeface="Aptos"/>
               </a:defRPr>
             </a:pPr>
             <a:r>
-              <a:t>Research question</a:t>
+              <a:t>Research questions</a:t>
             </a:r>
           </a:p>
         </p:txBody>
@@ -3861,8 +4954,8 @@
         </p:nvSpPr>
         <p:spPr>
           <a:xfrm>
-            <a:off x="822960" y="1508760"/>
-            <a:ext cx="10424160" cy="4663440"/>
+            <a:off x="731520" y="1417320"/>
+            <a:ext cx="10789920" cy="4846320"/>
           </a:xfrm>
           <a:prstGeom prst="rect">
             <a:avLst/>
@@ -3870,56 +4963,56 @@
           <a:noFill/>
         </p:spPr>
         <p:txBody>
-          <a:bodyPr wrap="none">
-            <a:spAutoFit/>
+          <a:bodyPr wrap="square">
+            <a:normAutofit/>
           </a:bodyPr>
           <a:lstStyle/>
           <a:p>
             <a:pPr>
               <a:spcAft>
-                <a:spcPts val="1700"/>
+                <a:spcPts val="1200"/>
               </a:spcAft>
-              <a:defRPr sz="2100">
-                <a:solidFill>
-                  <a:srgbClr val="F1F5F9"/>
+              <a:defRPr sz="2000">
+                <a:solidFill>
+                  <a:srgbClr val="0F172A"/>
                 </a:solidFill>
                 <a:latin typeface="Aptos"/>
               </a:defRPr>
             </a:pPr>
             <a:r>
-              <a:t>Can source-code representations identify recurring error patterns?</a:t>
+              <a:t>Can source-code representations recognize recurring programming-error patterns?</a:t>
             </a:r>
           </a:p>
           <a:p>
             <a:pPr>
               <a:spcAft>
-                <a:spcPts val="1700"/>
+                <a:spcPts val="1200"/>
               </a:spcAft>
-              <a:defRPr sz="2100">
-                <a:solidFill>
-                  <a:srgbClr val="F1F5F9"/>
+              <a:defRPr sz="2000">
+                <a:solidFill>
+                  <a:srgbClr val="0F172A"/>
                 </a:solidFill>
                 <a:latin typeface="Aptos"/>
               </a:defRPr>
             </a:pPr>
             <a:r>
-              <a:t>How does a prototype trained on generated labels behave on real submissions?</a:t>
+              <a:t>Does a model trained on generated labels transfer to real submissions?</a:t>
             </a:r>
           </a:p>
           <a:p>
             <a:pPr>
               <a:spcAft>
-                <a:spcPts val="1700"/>
+                <a:spcPts val="1200"/>
               </a:spcAft>
-              <a:defRPr sz="2100">
-                <a:solidFill>
-                  <a:srgbClr val="F1F5F9"/>
+              <a:defRPr sz="2000">
+                <a:solidFill>
+                  <a:srgbClr val="0F172A"/>
                 </a:solidFill>
                 <a:latin typeface="Aptos"/>
               </a:defRPr>
             </a:pPr>
             <a:r>
-              <a:t>What claims remain valid when real semantic labels are unavailable?</a:t>
+              <a:t>What does a successful research model require beyond this project setup?</a:t>
             </a:r>
           </a:p>
         </p:txBody>
@@ -3938,7 +5031,7 @@
     <p:bg>
       <p:bgPr>
         <a:solidFill>
-          <a:srgbClr val="0C172A"/>
+          <a:srgbClr val="F8FAFC"/>
         </a:solidFill>
         <a:effectLst/>
       </p:bgPr>
@@ -3958,8 +5051,8 @@
         </p:nvSpPr>
         <p:spPr>
           <a:xfrm>
-            <a:off x="640080" y="411480"/>
-            <a:ext cx="10881360" cy="731520"/>
+            <a:off x="502920" y="320040"/>
+            <a:ext cx="11155680" cy="502920"/>
           </a:xfrm>
           <a:prstGeom prst="rect">
             <a:avLst/>
@@ -3967,21 +5060,21 @@
           <a:noFill/>
         </p:spPr>
         <p:txBody>
-          <a:bodyPr wrap="none">
-            <a:spAutoFit/>
+          <a:bodyPr wrap="square">
+            <a:normAutofit/>
           </a:bodyPr>
           <a:lstStyle/>
           <a:p>
             <a:pPr>
-              <a:defRPr sz="2800" b="1">
-                <a:solidFill>
-                  <a:srgbClr val="F1F5F9"/>
-                </a:solidFill>
-                <a:latin typeface="Aptos Display"/>
+              <a:defRPr sz="2700" b="1">
+                <a:solidFill>
+                  <a:srgbClr val="0F172A"/>
+                </a:solidFill>
+                <a:latin typeface="Aptos"/>
               </a:defRPr>
             </a:pPr>
             <a:r>
-              <a:t>Eight-label prototype taxonomy</a:t>
+              <a:t>System built in this project</a:t>
             </a:r>
           </a:p>
         </p:txBody>
@@ -3994,8 +5087,8 @@
         </p:nvSpPr>
         <p:spPr>
           <a:xfrm>
-            <a:off x="822960" y="1508760"/>
-            <a:ext cx="10424160" cy="4663440"/>
+            <a:off x="731520" y="1417320"/>
+            <a:ext cx="10789920" cy="4846320"/>
           </a:xfrm>
           <a:prstGeom prst="rect">
             <a:avLst/>
@@ -4003,72 +5096,72 @@
           <a:noFill/>
         </p:spPr>
         <p:txBody>
-          <a:bodyPr wrap="none">
-            <a:spAutoFit/>
+          <a:bodyPr wrap="square">
+            <a:normAutofit/>
           </a:bodyPr>
           <a:lstStyle/>
           <a:p>
             <a:pPr>
               <a:spcAft>
-                <a:spcPts val="1700"/>
+                <a:spcPts val="1200"/>
               </a:spcAft>
-              <a:defRPr sz="2100">
-                <a:solidFill>
-                  <a:srgbClr val="F1F5F9"/>
+              <a:defRPr sz="2000">
+                <a:solidFill>
+                  <a:srgbClr val="0F172A"/>
                 </a:solidFill>
                 <a:latin typeface="Aptos"/>
               </a:defRPr>
             </a:pPr>
             <a:r>
-              <a:t>Correct solution • syntax error • variable misuse • loop logic error</a:t>
+              <a:t>Reusable Python package with data loading, preprocessing, features, training and evaluation modules.</a:t>
             </a:r>
           </a:p>
           <a:p>
             <a:pPr>
               <a:spcAft>
-                <a:spcPts val="1700"/>
+                <a:spcPts val="1200"/>
               </a:spcAft>
-              <a:defRPr sz="2100">
-                <a:solidFill>
-                  <a:srgbClr val="F1F5F9"/>
+              <a:defRPr sz="2000">
+                <a:solidFill>
+                  <a:srgbClr val="0F172A"/>
                 </a:solidFill>
                 <a:latin typeface="Aptos"/>
               </a:defRPr>
             </a:pPr>
             <a:r>
-              <a:t>Conditional logic error • function definition error</a:t>
+              <a:t>Command-line scripts for dataset preparation, training, evaluation and prediction.</a:t>
             </a:r>
           </a:p>
           <a:p>
             <a:pPr>
               <a:spcAft>
-                <a:spcPts val="1700"/>
+                <a:spcPts val="1200"/>
               </a:spcAft>
-              <a:defRPr sz="2100">
-                <a:solidFill>
-                  <a:srgbClr val="F1F5F9"/>
+              <a:defRPr sz="2000">
+                <a:solidFill>
+                  <a:srgbClr val="0F172A"/>
                 </a:solidFill>
                 <a:latin typeface="Aptos"/>
               </a:defRPr>
             </a:pPr>
             <a:r>
-              <a:t>Data-structure misuse • algorithmic inefficiency</a:t>
+              <a:t>Two model paths: TF-IDF + Linear SVM and CodeBERT sequence classification.</a:t>
             </a:r>
           </a:p>
           <a:p>
             <a:pPr>
               <a:spcAft>
-                <a:spcPts val="1700"/>
+                <a:spcPts val="1200"/>
               </a:spcAft>
-              <a:defRPr sz="2100">
-                <a:solidFill>
-                  <a:srgbClr val="F1F5F9"/>
+              <a:defRPr sz="2000">
+                <a:solidFill>
+                  <a:srgbClr val="0F172A"/>
                 </a:solidFill>
                 <a:latin typeface="Aptos"/>
               </a:defRPr>
             </a:pPr>
             <a:r>
-              <a:t>Current formulation assigns one dominant label per submission.</a:t>
+              <a:t>Instructor-facing Streamlit dashboard for pasted code, sample examples and CSV upload.</a:t>
             </a:r>
           </a:p>
         </p:txBody>
@@ -4087,7 +5180,7 @@
     <p:bg>
       <p:bgPr>
         <a:solidFill>
-          <a:srgbClr val="0C172A"/>
+          <a:srgbClr val="F8FAFC"/>
         </a:solidFill>
         <a:effectLst/>
       </p:bgPr>
@@ -4107,8 +5200,8 @@
         </p:nvSpPr>
         <p:spPr>
           <a:xfrm>
-            <a:off x="640080" y="411480"/>
-            <a:ext cx="10881360" cy="731520"/>
+            <a:off x="502920" y="320040"/>
+            <a:ext cx="11155680" cy="502920"/>
           </a:xfrm>
           <a:prstGeom prst="rect">
             <a:avLst/>
@@ -4116,21 +5209,21 @@
           <a:noFill/>
         </p:spPr>
         <p:txBody>
-          <a:bodyPr wrap="none">
-            <a:spAutoFit/>
+          <a:bodyPr wrap="square">
+            <a:normAutofit/>
           </a:bodyPr>
           <a:lstStyle/>
           <a:p>
             <a:pPr>
-              <a:defRPr sz="2800" b="1">
-                <a:solidFill>
-                  <a:srgbClr val="F1F5F9"/>
-                </a:solidFill>
-                <a:latin typeface="Aptos Display"/>
+              <a:defRPr sz="2700" b="1">
+                <a:solidFill>
+                  <a:srgbClr val="0F172A"/>
+                </a:solidFill>
+                <a:latin typeface="Aptos"/>
               </a:defRPr>
             </a:pPr>
             <a:r>
-              <a:t>Two datasets, two claims</a:t>
+              <a:t>Datasets and labels</a:t>
             </a:r>
           </a:p>
         </p:txBody>
@@ -4143,8 +5236,8 @@
         </p:nvSpPr>
         <p:spPr>
           <a:xfrm>
-            <a:off x="822960" y="1508760"/>
-            <a:ext cx="10424160" cy="4663440"/>
+            <a:off x="731520" y="1417320"/>
+            <a:ext cx="10789920" cy="4846320"/>
           </a:xfrm>
           <a:prstGeom prst="rect">
             <a:avLst/>
@@ -4152,72 +5245,72 @@
           <a:noFill/>
         </p:spPr>
         <p:txBody>
-          <a:bodyPr wrap="none">
-            <a:spAutoFit/>
+          <a:bodyPr wrap="square">
+            <a:normAutofit/>
           </a:bodyPr>
           <a:lstStyle/>
           <a:p>
             <a:pPr>
               <a:spcAft>
-                <a:spcPts val="1700"/>
+                <a:spcPts val="1200"/>
               </a:spcAft>
-              <a:defRPr sz="2100">
-                <a:solidFill>
-                  <a:srgbClr val="F1F5F9"/>
+              <a:defRPr sz="2000">
+                <a:solidFill>
+                  <a:srgbClr val="0F172A"/>
                 </a:solidFill>
                 <a:latin typeface="Aptos"/>
               </a:defRPr>
             </a:pPr>
             <a:r>
-              <a:t>Synthetic: 976 unique, balanced examples across eight prototype labels.</a:t>
+              <a:t>Synthetic prototype: 976 unique balanced Python snippets across eight labels.</a:t>
             </a:r>
           </a:p>
           <a:p>
             <a:pPr>
               <a:spcAft>
-                <a:spcPts val="1700"/>
+                <a:spcPts val="1200"/>
               </a:spcAft>
-              <a:defRPr sz="2100">
-                <a:solidFill>
-                  <a:srgbClr val="F1F5F9"/>
+              <a:defRPr sz="2000">
+                <a:solidFill>
+                  <a:srgbClr val="0F172A"/>
                 </a:solidFill>
                 <a:latin typeface="Aptos"/>
               </a:defRPr>
             </a:pPr>
             <a:r>
-              <a:t>CodeContests: real competitive-programming submissions.</a:t>
+              <a:t>Eight-label taxonomy: correct, syntax, variable misuse, loop logic, conditional logic, function definition, data-structure misuse and algorithmic inefficiency.</a:t>
             </a:r>
           </a:p>
           <a:p>
             <a:pPr>
               <a:spcAft>
-                <a:spcPts val="1700"/>
+                <a:spcPts val="1200"/>
               </a:spcAft>
-              <a:defRPr sz="2100">
-                <a:solidFill>
-                  <a:srgbClr val="F1F5F9"/>
+              <a:defRPr sz="2000">
+                <a:solidFill>
+                  <a:srgbClr val="0F172A"/>
                 </a:solidFill>
                 <a:latin typeface="Aptos"/>
               </a:defRPr>
             </a:pPr>
             <a:r>
-              <a:t>Real labels are limited to accepted solution vs AST-confirmed syntax error.</a:t>
+              <a:t>CodeContests validation: real Python submissions using official problem splits.</a:t>
             </a:r>
           </a:p>
           <a:p>
             <a:pPr>
               <a:spcAft>
-                <a:spcPts val="1700"/>
+                <a:spcPts val="1200"/>
               </a:spcAft>
-              <a:defRPr sz="2100">
-                <a:solidFill>
-                  <a:srgbClr val="F1F5F9"/>
+              <a:defRPr sz="2000">
+                <a:solidFill>
+                  <a:srgbClr val="0F172A"/>
                 </a:solidFill>
                 <a:latin typeface="Aptos"/>
               </a:defRPr>
             </a:pPr>
             <a:r>
-              <a:t>Parseable incorrect code is excluded instead of receiving invented labels.</a:t>
+              <a:t>Real-data labels are limited to accepted solutions and AST-confirmed syntax errors.</a:t>
             </a:r>
           </a:p>
         </p:txBody>
@@ -4236,7 +5329,7 @@
     <p:bg>
       <p:bgPr>
         <a:solidFill>
-          <a:srgbClr val="0C172A"/>
+          <a:srgbClr val="F8FAFC"/>
         </a:solidFill>
         <a:effectLst/>
       </p:bgPr>
@@ -4256,8 +5349,8 @@
         </p:nvSpPr>
         <p:spPr>
           <a:xfrm>
-            <a:off x="640080" y="411480"/>
-            <a:ext cx="10881360" cy="731520"/>
+            <a:off x="502920" y="320040"/>
+            <a:ext cx="11155680" cy="502920"/>
           </a:xfrm>
           <a:prstGeom prst="rect">
             <a:avLst/>
@@ -4265,21 +5358,21 @@
           <a:noFill/>
         </p:spPr>
         <p:txBody>
-          <a:bodyPr wrap="none">
-            <a:spAutoFit/>
+          <a:bodyPr wrap="square">
+            <a:normAutofit/>
           </a:bodyPr>
           <a:lstStyle/>
           <a:p>
             <a:pPr>
-              <a:defRPr sz="2800" b="1">
-                <a:solidFill>
-                  <a:srgbClr val="F1F5F9"/>
-                </a:solidFill>
-                <a:latin typeface="Aptos Display"/>
+              <a:defRPr sz="2700" b="1">
+                <a:solidFill>
+                  <a:srgbClr val="0F172A"/>
+                </a:solidFill>
+                <a:latin typeface="Aptos"/>
               </a:defRPr>
             </a:pPr>
             <a:r>
-              <a:t>Leakage-safe processing</a:t>
+              <a:t>Data integrity controls</a:t>
             </a:r>
           </a:p>
         </p:txBody>
@@ -4292,8 +5385,8 @@
         </p:nvSpPr>
         <p:spPr>
           <a:xfrm>
-            <a:off x="822960" y="1508760"/>
-            <a:ext cx="10424160" cy="4663440"/>
+            <a:off x="731520" y="1417320"/>
+            <a:ext cx="10789920" cy="4846320"/>
           </a:xfrm>
           <a:prstGeom prst="rect">
             <a:avLst/>
@@ -4301,72 +5394,72 @@
           <a:noFill/>
         </p:spPr>
         <p:txBody>
-          <a:bodyPr wrap="none">
-            <a:spAutoFit/>
+          <a:bodyPr wrap="square">
+            <a:normAutofit/>
           </a:bodyPr>
           <a:lstStyle/>
           <a:p>
             <a:pPr>
               <a:spcAft>
-                <a:spcPts val="1700"/>
+                <a:spcPts val="1200"/>
               </a:spcAft>
-              <a:defRPr sz="2100">
-                <a:solidFill>
-                  <a:srgbClr val="F1F5F9"/>
+              <a:defRPr sz="2000">
+                <a:solidFill>
+                  <a:srgbClr val="0F172A"/>
                 </a:solidFill>
                 <a:latin typeface="Aptos"/>
               </a:defRPr>
             </a:pPr>
             <a:r>
-              <a:t>Normalize line endings and outer whitespace; hash each code sample.</a:t>
+              <a:t>Normalize each code sample, hash it and remove duplicates.</a:t>
             </a:r>
           </a:p>
           <a:p>
             <a:pPr>
               <a:spcAft>
-                <a:spcPts val="1700"/>
+                <a:spcPts val="1200"/>
               </a:spcAft>
-              <a:defRPr sz="2100">
-                <a:solidFill>
-                  <a:srgbClr val="F1F5F9"/>
+              <a:defRPr sz="2000">
+                <a:solidFill>
+                  <a:srgbClr val="0F172A"/>
                 </a:solidFill>
                 <a:latin typeface="Aptos"/>
               </a:defRPr>
             </a:pPr>
             <a:r>
-              <a:t>Remove within-split duplicates and reject train/test overlap.</a:t>
+              <a:t>Reject any experiment where train and test fingerprints overlap.</a:t>
             </a:r>
           </a:p>
           <a:p>
             <a:pPr>
               <a:spcAft>
-                <a:spcPts val="1700"/>
+                <a:spcPts val="1200"/>
               </a:spcAft>
-              <a:defRPr sz="2100">
-                <a:solidFill>
-                  <a:srgbClr val="F1F5F9"/>
+              <a:defRPr sz="2000">
+                <a:solidFill>
+                  <a:srgbClr val="0F172A"/>
                 </a:solidFill>
                 <a:latin typeface="Aptos"/>
               </a:defRPr>
             </a:pPr>
             <a:r>
-              <a:t>Use stratified synthetic split and official CodeContests problem splits.</a:t>
+              <a:t>Use a deterministic stratified split for the synthetic data.</a:t>
             </a:r>
           </a:p>
           <a:p>
             <a:pPr>
               <a:spcAft>
-                <a:spcPts val="1700"/>
+                <a:spcPts val="1200"/>
               </a:spcAft>
-              <a:defRPr sz="2100">
-                <a:solidFill>
-                  <a:srgbClr val="F1F5F9"/>
+              <a:defRPr sz="2000">
+                <a:solidFill>
+                  <a:srgbClr val="0F172A"/>
                 </a:solidFill>
                 <a:latin typeface="Aptos"/>
               </a:defRPr>
             </a:pPr>
             <a:r>
-              <a:t>Persist configuration, predictions, timings, metrics and confusion matrices.</a:t>
+              <a:t>Use the official CodeContests problem split to reduce problem-level leakage.</a:t>
             </a:r>
           </a:p>
         </p:txBody>
@@ -4385,7 +5478,7 @@
     <p:bg>
       <p:bgPr>
         <a:solidFill>
-          <a:srgbClr val="0C172A"/>
+          <a:srgbClr val="F8FAFC"/>
         </a:solidFill>
         <a:effectLst/>
       </p:bgPr>
@@ -4405,8 +5498,8 @@
         </p:nvSpPr>
         <p:spPr>
           <a:xfrm>
-            <a:off x="640080" y="411480"/>
-            <a:ext cx="10881360" cy="731520"/>
+            <a:off x="502920" y="320040"/>
+            <a:ext cx="11155680" cy="502920"/>
           </a:xfrm>
           <a:prstGeom prst="rect">
             <a:avLst/>
@@ -4414,21 +5507,21 @@
           <a:noFill/>
         </p:spPr>
         <p:txBody>
-          <a:bodyPr wrap="none">
-            <a:spAutoFit/>
+          <a:bodyPr wrap="square">
+            <a:normAutofit/>
           </a:bodyPr>
           <a:lstStyle/>
           <a:p>
             <a:pPr>
-              <a:defRPr sz="2800" b="1">
-                <a:solidFill>
-                  <a:srgbClr val="F1F5F9"/>
-                </a:solidFill>
-                <a:latin typeface="Aptos Display"/>
+              <a:defRPr sz="2700" b="1">
+                <a:solidFill>
+                  <a:srgbClr val="0F172A"/>
+                </a:solidFill>
+                <a:latin typeface="Aptos"/>
               </a:defRPr>
             </a:pPr>
             <a:r>
-              <a:t>Baseline: TF-IDF + Linear SVM</a:t>
+              <a:t>Model approaches</a:t>
             </a:r>
           </a:p>
         </p:txBody>
@@ -4441,8 +5534,8 @@
         </p:nvSpPr>
         <p:spPr>
           <a:xfrm>
-            <a:off x="822960" y="1508760"/>
-            <a:ext cx="10424160" cy="4663440"/>
+            <a:off x="731520" y="1417320"/>
+            <a:ext cx="10789920" cy="4846320"/>
           </a:xfrm>
           <a:prstGeom prst="rect">
             <a:avLst/>
@@ -4450,72 +5543,72 @@
           <a:noFill/>
         </p:spPr>
         <p:txBody>
-          <a:bodyPr wrap="none">
-            <a:spAutoFit/>
+          <a:bodyPr wrap="square">
+            <a:normAutofit/>
           </a:bodyPr>
           <a:lstStyle/>
           <a:p>
             <a:pPr>
               <a:spcAft>
-                <a:spcPts val="1700"/>
+                <a:spcPts val="1200"/>
               </a:spcAft>
-              <a:defRPr sz="2100">
-                <a:solidFill>
-                  <a:srgbClr val="F1F5F9"/>
+              <a:defRPr sz="2000">
+                <a:solidFill>
+                  <a:srgbClr val="0F172A"/>
                 </a:solidFill>
                 <a:latin typeface="Aptos"/>
               </a:defRPr>
             </a:pPr>
             <a:r>
-              <a:t>Normalize Python code tokens and identifiers.</a:t>
+              <a:t>SVM baseline: tokenized code, unigram/bigram TF-IDF features and LinearSVC.</a:t>
             </a:r>
           </a:p>
           <a:p>
             <a:pPr>
               <a:spcAft>
-                <a:spcPts val="1700"/>
+                <a:spcPts val="1200"/>
               </a:spcAft>
-              <a:defRPr sz="2100">
-                <a:solidFill>
-                  <a:srgbClr val="F1F5F9"/>
+              <a:defRPr sz="2000">
+                <a:solidFill>
+                  <a:srgbClr val="0F172A"/>
                 </a:solidFill>
                 <a:latin typeface="Aptos"/>
               </a:defRPr>
             </a:pPr>
             <a:r>
-              <a:t>Extract unigram and bigram TF-IDF features.</a:t>
+              <a:t>CodeBERT: microsoft/codebert-base with a sequence-classification head.</a:t>
             </a:r>
           </a:p>
           <a:p>
             <a:pPr>
               <a:spcAft>
-                <a:spcPts val="1700"/>
+                <a:spcPts val="1200"/>
               </a:spcAft>
-              <a:defRPr sz="2100">
-                <a:solidFill>
-                  <a:srgbClr val="F1F5F9"/>
+              <a:defRPr sz="2000">
+                <a:solidFill>
+                  <a:srgbClr val="0F172A"/>
                 </a:solidFill>
                 <a:latin typeface="Aptos"/>
               </a:defRPr>
             </a:pPr>
             <a:r>
-              <a:t>Train a fast, reproducible LinearSVC classifier.</a:t>
+              <a:t>CodeBERT settings: max length 256, batch size 8, gradient accumulation, early stopping and seed 42.</a:t>
             </a:r>
           </a:p>
           <a:p>
             <a:pPr>
               <a:spcAft>
-                <a:spcPts val="1700"/>
+                <a:spcPts val="1200"/>
               </a:spcAft>
-              <a:defRPr sz="2100">
-                <a:solidFill>
-                  <a:srgbClr val="F1F5F9"/>
+              <a:defRPr sz="2000">
+                <a:solidFill>
+                  <a:srgbClr val="0F172A"/>
                 </a:solidFill>
                 <a:latin typeface="Aptos"/>
               </a:defRPr>
             </a:pPr>
             <a:r>
-              <a:t>Limitation: lexical features do not directly execute or reason about code.</a:t>
+              <a:t>The full real-data CodeBERT target was resource-heavy, so a reduced CodeContests run is reported.</a:t>
             </a:r>
           </a:p>
         </p:txBody>
@@ -4534,7 +5627,7 @@
     <p:bg>
       <p:bgPr>
         <a:solidFill>
-          <a:srgbClr val="0C172A"/>
+          <a:srgbClr val="F8FAFC"/>
         </a:solidFill>
         <a:effectLst/>
       </p:bgPr>
@@ -4554,8 +5647,8 @@
         </p:nvSpPr>
         <p:spPr>
           <a:xfrm>
-            <a:off x="640080" y="411480"/>
-            <a:ext cx="10881360" cy="731520"/>
+            <a:off x="502920" y="320040"/>
+            <a:ext cx="11155680" cy="502920"/>
           </a:xfrm>
           <a:prstGeom prst="rect">
             <a:avLst/>
@@ -4563,21 +5656,21 @@
           <a:noFill/>
         </p:spPr>
         <p:txBody>
-          <a:bodyPr wrap="none">
-            <a:spAutoFit/>
+          <a:bodyPr wrap="square">
+            <a:normAutofit/>
           </a:bodyPr>
           <a:lstStyle/>
           <a:p>
             <a:pPr>
-              <a:defRPr sz="2800" b="1">
-                <a:solidFill>
-                  <a:srgbClr val="F1F5F9"/>
-                </a:solidFill>
-                <a:latin typeface="Aptos Display"/>
+              <a:defRPr sz="2700" b="1">
+                <a:solidFill>
+                  <a:srgbClr val="0F172A"/>
+                </a:solidFill>
+                <a:latin typeface="Aptos"/>
               </a:defRPr>
             </a:pPr>
             <a:r>
-              <a:t>Deep model: CodeBERT</a:t>
+              <a:t>Measured model results</a:t>
             </a:r>
           </a:p>
         </p:txBody>
@@ -4590,8 +5683,8 @@
         </p:nvSpPr>
         <p:spPr>
           <a:xfrm>
-            <a:off x="822960" y="1508760"/>
-            <a:ext cx="10424160" cy="4663440"/>
+            <a:off x="530352" y="841248"/>
+            <a:ext cx="10972800" cy="329184"/>
           </a:xfrm>
           <a:prstGeom prst="rect">
             <a:avLst/>
@@ -4599,76 +5692,930 @@
           <a:noFill/>
         </p:spPr>
         <p:txBody>
-          <a:bodyPr wrap="none">
-            <a:spAutoFit/>
+          <a:bodyPr wrap="square">
+            <a:normAutofit/>
           </a:bodyPr>
           <a:lstStyle/>
           <a:p>
             <a:pPr>
-              <a:spcAft>
-                <a:spcPts val="1700"/>
-              </a:spcAft>
-              <a:defRPr sz="2100">
-                <a:solidFill>
-                  <a:srgbClr val="F1F5F9"/>
+              <a:defRPr sz="1300" b="0">
+                <a:solidFill>
+                  <a:srgbClr val="0D9488"/>
                 </a:solidFill>
                 <a:latin typeface="Aptos"/>
               </a:defRPr>
             </a:pPr>
             <a:r>
-              <a:t>microsoft/codebert-base with a sequence-classification head.</a:t>
-            </a:r>
-          </a:p>
-          <a:p>
-            <a:pPr>
-              <a:spcAft>
-                <a:spcPts val="1700"/>
-              </a:spcAft>
-              <a:defRPr sz="2100">
-                <a:solidFill>
-                  <a:srgbClr val="F1F5F9"/>
-                </a:solidFill>
-                <a:latin typeface="Aptos"/>
-              </a:defRPr>
-            </a:pPr>
-            <a:r>
-              <a:t>Maximum length 256; batch size 8; gradient accumulation.</a:t>
-            </a:r>
-          </a:p>
-          <a:p>
-            <a:pPr>
-              <a:spcAft>
-                <a:spcPts val="1700"/>
-              </a:spcAft>
-              <a:defRPr sz="2100">
-                <a:solidFill>
-                  <a:srgbClr val="F1F5F9"/>
-                </a:solidFill>
-                <a:latin typeface="Aptos"/>
-              </a:defRPr>
-            </a:pPr>
-            <a:r>
-              <a:t>Mixed precision on CUDA, early stopping and fixed random seed.</a:t>
-            </a:r>
-          </a:p>
-          <a:p>
-            <a:pPr>
-              <a:spcAft>
-                <a:spcPts val="1700"/>
-              </a:spcAft>
-              <a:defRPr sz="2100">
-                <a:solidFill>
-                  <a:srgbClr val="F1F5F9"/>
-                </a:solidFill>
-                <a:latin typeface="Aptos"/>
-              </a:defRPr>
-            </a:pPr>
-            <a:r>
-              <a:t>Executed in Colab; metrics are reported only after a completed run.</a:t>
-            </a:r>
-          </a:p>
-        </p:txBody>
-      </p:sp>
+              <a:t>Macro F1 is the main metric because the real test set is imbalanced</a:t>
+            </a:r>
+          </a:p>
+        </p:txBody>
+      </p:sp>
+      <p:graphicFrame>
+        <p:nvGraphicFramePr>
+          <p:cNvPr id="4" name="Table 3"/>
+          <p:cNvGraphicFramePr>
+            <a:graphicFrameLocks noGrp="1"/>
+          </p:cNvGraphicFramePr>
+          <p:nvPr/>
+        </p:nvGraphicFramePr>
+        <p:xfrm>
+          <a:off x="411480" y="1325880"/>
+          <a:ext cx="11338560" cy="1965960"/>
+        </p:xfrm>
+        <a:graphic>
+          <a:graphicData uri="http://schemas.openxmlformats.org/drawingml/2006/table">
+            <a:tbl>
+              <a:tblPr firstRow="1" bandRow="1">
+                <a:tableStyleId>{5C22544A-7EE6-4342-B048-85BDC9FD1C3A}</a:tableStyleId>
+              </a:tblPr>
+              <a:tblGrid>
+                <a:gridCol w="1619794"/>
+                <a:gridCol w="1619794"/>
+                <a:gridCol w="1619794"/>
+                <a:gridCol w="1619794"/>
+                <a:gridCol w="1619794"/>
+                <a:gridCol w="1619794"/>
+                <a:gridCol w="1619796"/>
+              </a:tblGrid>
+              <a:tr h="393192">
+                <a:tc>
+                  <a:txBody>
+                    <a:bodyPr/>
+                    <a:lstStyle/>
+                    <a:p>
+                      <a:pPr>
+                        <a:defRPr sz="1200" b="1">
+                          <a:solidFill>
+                            <a:srgbClr val="FFFFFF"/>
+                          </a:solidFill>
+                          <a:latin typeface="Aptos"/>
+                        </a:defRPr>
+                      </a:pPr>
+                      <a:r>
+                        <a:t>Model</a:t>
+                      </a:r>
+                    </a:p>
+                  </a:txBody>
+                  <a:tcPr>
+                    <a:solidFill>
+                      <a:srgbClr val="2563EB"/>
+                    </a:solidFill>
+                  </a:tcPr>
+                </a:tc>
+                <a:tc>
+                  <a:txBody>
+                    <a:bodyPr/>
+                    <a:lstStyle/>
+                    <a:p>
+                      <a:pPr>
+                        <a:defRPr sz="1200" b="1">
+                          <a:solidFill>
+                            <a:srgbClr val="FFFFFF"/>
+                          </a:solidFill>
+                          <a:latin typeface="Aptos"/>
+                        </a:defRPr>
+                      </a:pPr>
+                      <a:r>
+                        <a:t>Dataset</a:t>
+                      </a:r>
+                    </a:p>
+                  </a:txBody>
+                  <a:tcPr>
+                    <a:solidFill>
+                      <a:srgbClr val="2563EB"/>
+                    </a:solidFill>
+                  </a:tcPr>
+                </a:tc>
+                <a:tc>
+                  <a:txBody>
+                    <a:bodyPr/>
+                    <a:lstStyle/>
+                    <a:p>
+                      <a:pPr>
+                        <a:defRPr sz="1200" b="1">
+                          <a:solidFill>
+                            <a:srgbClr val="FFFFFF"/>
+                          </a:solidFill>
+                          <a:latin typeface="Aptos"/>
+                        </a:defRPr>
+                      </a:pPr>
+                      <a:r>
+                        <a:t>Train</a:t>
+                      </a:r>
+                    </a:p>
+                  </a:txBody>
+                  <a:tcPr>
+                    <a:solidFill>
+                      <a:srgbClr val="2563EB"/>
+                    </a:solidFill>
+                  </a:tcPr>
+                </a:tc>
+                <a:tc>
+                  <a:txBody>
+                    <a:bodyPr/>
+                    <a:lstStyle/>
+                    <a:p>
+                      <a:pPr>
+                        <a:defRPr sz="1200" b="1">
+                          <a:solidFill>
+                            <a:srgbClr val="FFFFFF"/>
+                          </a:solidFill>
+                          <a:latin typeface="Aptos"/>
+                        </a:defRPr>
+                      </a:pPr>
+                      <a:r>
+                        <a:t>Test</a:t>
+                      </a:r>
+                    </a:p>
+                  </a:txBody>
+                  <a:tcPr>
+                    <a:solidFill>
+                      <a:srgbClr val="2563EB"/>
+                    </a:solidFill>
+                  </a:tcPr>
+                </a:tc>
+                <a:tc>
+                  <a:txBody>
+                    <a:bodyPr/>
+                    <a:lstStyle/>
+                    <a:p>
+                      <a:pPr>
+                        <a:defRPr sz="1200" b="1">
+                          <a:solidFill>
+                            <a:srgbClr val="FFFFFF"/>
+                          </a:solidFill>
+                          <a:latin typeface="Aptos"/>
+                        </a:defRPr>
+                      </a:pPr>
+                      <a:r>
+                        <a:t>Accuracy</a:t>
+                      </a:r>
+                    </a:p>
+                  </a:txBody>
+                  <a:tcPr>
+                    <a:solidFill>
+                      <a:srgbClr val="2563EB"/>
+                    </a:solidFill>
+                  </a:tcPr>
+                </a:tc>
+                <a:tc>
+                  <a:txBody>
+                    <a:bodyPr/>
+                    <a:lstStyle/>
+                    <a:p>
+                      <a:pPr>
+                        <a:defRPr sz="1200" b="1">
+                          <a:solidFill>
+                            <a:srgbClr val="FFFFFF"/>
+                          </a:solidFill>
+                          <a:latin typeface="Aptos"/>
+                        </a:defRPr>
+                      </a:pPr>
+                      <a:r>
+                        <a:t>Macro F1</a:t>
+                      </a:r>
+                    </a:p>
+                  </a:txBody>
+                  <a:tcPr>
+                    <a:solidFill>
+                      <a:srgbClr val="2563EB"/>
+                    </a:solidFill>
+                  </a:tcPr>
+                </a:tc>
+                <a:tc>
+                  <a:txBody>
+                    <a:bodyPr/>
+                    <a:lstStyle/>
+                    <a:p>
+                      <a:pPr>
+                        <a:defRPr sz="1200" b="1">
+                          <a:solidFill>
+                            <a:srgbClr val="FFFFFF"/>
+                          </a:solidFill>
+                          <a:latin typeface="Aptos"/>
+                        </a:defRPr>
+                      </a:pPr>
+                      <a:r>
+                        <a:t>Weighted F1</a:t>
+                      </a:r>
+                    </a:p>
+                  </a:txBody>
+                  <a:tcPr>
+                    <a:solidFill>
+                      <a:srgbClr val="2563EB"/>
+                    </a:solidFill>
+                  </a:tcPr>
+                </a:tc>
+              </a:tr>
+              <a:tr h="393192">
+                <a:tc>
+                  <a:txBody>
+                    <a:bodyPr/>
+                    <a:lstStyle/>
+                    <a:p>
+                      <a:pPr>
+                        <a:defRPr sz="1200" b="0">
+                          <a:solidFill>
+                            <a:srgbClr val="0F172A"/>
+                          </a:solidFill>
+                          <a:latin typeface="Aptos"/>
+                        </a:defRPr>
+                      </a:pPr>
+                      <a:r>
+                        <a:t>SVM</a:t>
+                      </a:r>
+                    </a:p>
+                  </a:txBody>
+                  <a:tcPr>
+                    <a:solidFill>
+                      <a:srgbClr val="FFFFFF"/>
+                    </a:solidFill>
+                  </a:tcPr>
+                </a:tc>
+                <a:tc>
+                  <a:txBody>
+                    <a:bodyPr/>
+                    <a:lstStyle/>
+                    <a:p>
+                      <a:pPr>
+                        <a:defRPr sz="1200" b="0">
+                          <a:solidFill>
+                            <a:srgbClr val="0F172A"/>
+                          </a:solidFill>
+                          <a:latin typeface="Aptos"/>
+                        </a:defRPr>
+                      </a:pPr>
+                      <a:r>
+                        <a:t>Synthetic 8-class</a:t>
+                      </a:r>
+                    </a:p>
+                  </a:txBody>
+                  <a:tcPr>
+                    <a:solidFill>
+                      <a:srgbClr val="FFFFFF"/>
+                    </a:solidFill>
+                  </a:tcPr>
+                </a:tc>
+                <a:tc>
+                  <a:txBody>
+                    <a:bodyPr/>
+                    <a:lstStyle/>
+                    <a:p>
+                      <a:pPr>
+                        <a:defRPr sz="1200" b="0">
+                          <a:solidFill>
+                            <a:srgbClr val="0F172A"/>
+                          </a:solidFill>
+                          <a:latin typeface="Aptos"/>
+                        </a:defRPr>
+                      </a:pPr>
+                      <a:r>
+                        <a:t>732</a:t>
+                      </a:r>
+                    </a:p>
+                  </a:txBody>
+                  <a:tcPr>
+                    <a:solidFill>
+                      <a:srgbClr val="FFFFFF"/>
+                    </a:solidFill>
+                  </a:tcPr>
+                </a:tc>
+                <a:tc>
+                  <a:txBody>
+                    <a:bodyPr/>
+                    <a:lstStyle/>
+                    <a:p>
+                      <a:pPr>
+                        <a:defRPr sz="1200" b="0">
+                          <a:solidFill>
+                            <a:srgbClr val="0F172A"/>
+                          </a:solidFill>
+                          <a:latin typeface="Aptos"/>
+                        </a:defRPr>
+                      </a:pPr>
+                      <a:r>
+                        <a:t>244</a:t>
+                      </a:r>
+                    </a:p>
+                  </a:txBody>
+                  <a:tcPr>
+                    <a:solidFill>
+                      <a:srgbClr val="FFFFFF"/>
+                    </a:solidFill>
+                  </a:tcPr>
+                </a:tc>
+                <a:tc>
+                  <a:txBody>
+                    <a:bodyPr/>
+                    <a:lstStyle/>
+                    <a:p>
+                      <a:pPr>
+                        <a:defRPr sz="1200" b="0">
+                          <a:solidFill>
+                            <a:srgbClr val="0F172A"/>
+                          </a:solidFill>
+                          <a:latin typeface="Aptos"/>
+                        </a:defRPr>
+                      </a:pPr>
+                      <a:r>
+                        <a:t>0.898</a:t>
+                      </a:r>
+                    </a:p>
+                  </a:txBody>
+                  <a:tcPr>
+                    <a:solidFill>
+                      <a:srgbClr val="FFFFFF"/>
+                    </a:solidFill>
+                  </a:tcPr>
+                </a:tc>
+                <a:tc>
+                  <a:txBody>
+                    <a:bodyPr/>
+                    <a:lstStyle/>
+                    <a:p>
+                      <a:pPr>
+                        <a:defRPr sz="1200" b="0">
+                          <a:solidFill>
+                            <a:srgbClr val="0F172A"/>
+                          </a:solidFill>
+                          <a:latin typeface="Aptos"/>
+                        </a:defRPr>
+                      </a:pPr>
+                      <a:r>
+                        <a:t>0.903</a:t>
+                      </a:r>
+                    </a:p>
+                  </a:txBody>
+                  <a:tcPr>
+                    <a:solidFill>
+                      <a:srgbClr val="FFFFFF"/>
+                    </a:solidFill>
+                  </a:tcPr>
+                </a:tc>
+                <a:tc>
+                  <a:txBody>
+                    <a:bodyPr/>
+                    <a:lstStyle/>
+                    <a:p>
+                      <a:pPr>
+                        <a:defRPr sz="1200" b="0">
+                          <a:solidFill>
+                            <a:srgbClr val="0F172A"/>
+                          </a:solidFill>
+                          <a:latin typeface="Aptos"/>
+                        </a:defRPr>
+                      </a:pPr>
+                      <a:r>
+                        <a:t>0.900</a:t>
+                      </a:r>
+                    </a:p>
+                  </a:txBody>
+                  <a:tcPr>
+                    <a:solidFill>
+                      <a:srgbClr val="FFFFFF"/>
+                    </a:solidFill>
+                  </a:tcPr>
+                </a:tc>
+              </a:tr>
+              <a:tr h="393192">
+                <a:tc>
+                  <a:txBody>
+                    <a:bodyPr/>
+                    <a:lstStyle/>
+                    <a:p>
+                      <a:pPr>
+                        <a:defRPr sz="1200" b="0">
+                          <a:solidFill>
+                            <a:srgbClr val="0F172A"/>
+                          </a:solidFill>
+                          <a:latin typeface="Aptos"/>
+                        </a:defRPr>
+                      </a:pPr>
+                      <a:r>
+                        <a:t>CodeBERT</a:t>
+                      </a:r>
+                    </a:p>
+                  </a:txBody>
+                  <a:tcPr>
+                    <a:solidFill>
+                      <a:srgbClr val="FFFFFF"/>
+                    </a:solidFill>
+                  </a:tcPr>
+                </a:tc>
+                <a:tc>
+                  <a:txBody>
+                    <a:bodyPr/>
+                    <a:lstStyle/>
+                    <a:p>
+                      <a:pPr>
+                        <a:defRPr sz="1200" b="0">
+                          <a:solidFill>
+                            <a:srgbClr val="0F172A"/>
+                          </a:solidFill>
+                          <a:latin typeface="Aptos"/>
+                        </a:defRPr>
+                      </a:pPr>
+                      <a:r>
+                        <a:t>Synthetic 8-class</a:t>
+                      </a:r>
+                    </a:p>
+                  </a:txBody>
+                  <a:tcPr>
+                    <a:solidFill>
+                      <a:srgbClr val="FFFFFF"/>
+                    </a:solidFill>
+                  </a:tcPr>
+                </a:tc>
+                <a:tc>
+                  <a:txBody>
+                    <a:bodyPr/>
+                    <a:lstStyle/>
+                    <a:p>
+                      <a:pPr>
+                        <a:defRPr sz="1200" b="0">
+                          <a:solidFill>
+                            <a:srgbClr val="0F172A"/>
+                          </a:solidFill>
+                          <a:latin typeface="Aptos"/>
+                        </a:defRPr>
+                      </a:pPr>
+                      <a:r>
+                        <a:t>732</a:t>
+                      </a:r>
+                    </a:p>
+                  </a:txBody>
+                  <a:tcPr>
+                    <a:solidFill>
+                      <a:srgbClr val="FFFFFF"/>
+                    </a:solidFill>
+                  </a:tcPr>
+                </a:tc>
+                <a:tc>
+                  <a:txBody>
+                    <a:bodyPr/>
+                    <a:lstStyle/>
+                    <a:p>
+                      <a:pPr>
+                        <a:defRPr sz="1200" b="0">
+                          <a:solidFill>
+                            <a:srgbClr val="0F172A"/>
+                          </a:solidFill>
+                          <a:latin typeface="Aptos"/>
+                        </a:defRPr>
+                      </a:pPr>
+                      <a:r>
+                        <a:t>244</a:t>
+                      </a:r>
+                    </a:p>
+                  </a:txBody>
+                  <a:tcPr>
+                    <a:solidFill>
+                      <a:srgbClr val="FFFFFF"/>
+                    </a:solidFill>
+                  </a:tcPr>
+                </a:tc>
+                <a:tc>
+                  <a:txBody>
+                    <a:bodyPr/>
+                    <a:lstStyle/>
+                    <a:p>
+                      <a:pPr>
+                        <a:defRPr sz="1200" b="0">
+                          <a:solidFill>
+                            <a:srgbClr val="0F172A"/>
+                          </a:solidFill>
+                          <a:latin typeface="Aptos"/>
+                        </a:defRPr>
+                      </a:pPr>
+                      <a:r>
+                        <a:t>0.549</a:t>
+                      </a:r>
+                    </a:p>
+                  </a:txBody>
+                  <a:tcPr>
+                    <a:solidFill>
+                      <a:srgbClr val="FFFFFF"/>
+                    </a:solidFill>
+                  </a:tcPr>
+                </a:tc>
+                <a:tc>
+                  <a:txBody>
+                    <a:bodyPr/>
+                    <a:lstStyle/>
+                    <a:p>
+                      <a:pPr>
+                        <a:defRPr sz="1200" b="0">
+                          <a:solidFill>
+                            <a:srgbClr val="0F172A"/>
+                          </a:solidFill>
+                          <a:latin typeface="Aptos"/>
+                        </a:defRPr>
+                      </a:pPr>
+                      <a:r>
+                        <a:t>0.439</a:t>
+                      </a:r>
+                    </a:p>
+                  </a:txBody>
+                  <a:tcPr>
+                    <a:solidFill>
+                      <a:srgbClr val="FFFFFF"/>
+                    </a:solidFill>
+                  </a:tcPr>
+                </a:tc>
+                <a:tc>
+                  <a:txBody>
+                    <a:bodyPr/>
+                    <a:lstStyle/>
+                    <a:p>
+                      <a:pPr>
+                        <a:defRPr sz="1200" b="0">
+                          <a:solidFill>
+                            <a:srgbClr val="0F172A"/>
+                          </a:solidFill>
+                          <a:latin typeface="Aptos"/>
+                        </a:defRPr>
+                      </a:pPr>
+                      <a:r>
+                        <a:t>0.448</a:t>
+                      </a:r>
+                    </a:p>
+                  </a:txBody>
+                  <a:tcPr>
+                    <a:solidFill>
+                      <a:srgbClr val="FFFFFF"/>
+                    </a:solidFill>
+                  </a:tcPr>
+                </a:tc>
+              </a:tr>
+              <a:tr h="393192">
+                <a:tc>
+                  <a:txBody>
+                    <a:bodyPr/>
+                    <a:lstStyle/>
+                    <a:p>
+                      <a:pPr>
+                        <a:defRPr sz="1200" b="0">
+                          <a:solidFill>
+                            <a:srgbClr val="0F172A"/>
+                          </a:solidFill>
+                          <a:latin typeface="Aptos"/>
+                        </a:defRPr>
+                      </a:pPr>
+                      <a:r>
+                        <a:t>SVM</a:t>
+                      </a:r>
+                    </a:p>
+                  </a:txBody>
+                  <a:tcPr>
+                    <a:solidFill>
+                      <a:srgbClr val="FFFFFF"/>
+                    </a:solidFill>
+                  </a:tcPr>
+                </a:tc>
+                <a:tc>
+                  <a:txBody>
+                    <a:bodyPr/>
+                    <a:lstStyle/>
+                    <a:p>
+                      <a:pPr>
+                        <a:defRPr sz="1200" b="0">
+                          <a:solidFill>
+                            <a:srgbClr val="0F172A"/>
+                          </a:solidFill>
+                          <a:latin typeface="Aptos"/>
+                        </a:defRPr>
+                      </a:pPr>
+                      <a:r>
+                        <a:t>CodeContests binary</a:t>
+                      </a:r>
+                    </a:p>
+                  </a:txBody>
+                  <a:tcPr>
+                    <a:solidFill>
+                      <a:srgbClr val="FFFFFF"/>
+                    </a:solidFill>
+                  </a:tcPr>
+                </a:tc>
+                <a:tc>
+                  <a:txBody>
+                    <a:bodyPr/>
+                    <a:lstStyle/>
+                    <a:p>
+                      <a:pPr>
+                        <a:defRPr sz="1200" b="0">
+                          <a:solidFill>
+                            <a:srgbClr val="0F172A"/>
+                          </a:solidFill>
+                          <a:latin typeface="Aptos"/>
+                        </a:defRPr>
+                      </a:pPr>
+                      <a:r>
+                        <a:t>19,999</a:t>
+                      </a:r>
+                    </a:p>
+                  </a:txBody>
+                  <a:tcPr>
+                    <a:solidFill>
+                      <a:srgbClr val="FFFFFF"/>
+                    </a:solidFill>
+                  </a:tcPr>
+                </a:tc>
+                <a:tc>
+                  <a:txBody>
+                    <a:bodyPr/>
+                    <a:lstStyle/>
+                    <a:p>
+                      <a:pPr>
+                        <a:defRPr sz="1200" b="0">
+                          <a:solidFill>
+                            <a:srgbClr val="0F172A"/>
+                          </a:solidFill>
+                          <a:latin typeface="Aptos"/>
+                        </a:defRPr>
+                      </a:pPr>
+                      <a:r>
+                        <a:t>2,059</a:t>
+                      </a:r>
+                    </a:p>
+                  </a:txBody>
+                  <a:tcPr>
+                    <a:solidFill>
+                      <a:srgbClr val="FFFFFF"/>
+                    </a:solidFill>
+                  </a:tcPr>
+                </a:tc>
+                <a:tc>
+                  <a:txBody>
+                    <a:bodyPr/>
+                    <a:lstStyle/>
+                    <a:p>
+                      <a:pPr>
+                        <a:defRPr sz="1200" b="0">
+                          <a:solidFill>
+                            <a:srgbClr val="0F172A"/>
+                          </a:solidFill>
+                          <a:latin typeface="Aptos"/>
+                        </a:defRPr>
+                      </a:pPr>
+                      <a:r>
+                        <a:t>0.705</a:t>
+                      </a:r>
+                    </a:p>
+                  </a:txBody>
+                  <a:tcPr>
+                    <a:solidFill>
+                      <a:srgbClr val="FFFFFF"/>
+                    </a:solidFill>
+                  </a:tcPr>
+                </a:tc>
+                <a:tc>
+                  <a:txBody>
+                    <a:bodyPr/>
+                    <a:lstStyle/>
+                    <a:p>
+                      <a:pPr>
+                        <a:defRPr sz="1200" b="0">
+                          <a:solidFill>
+                            <a:srgbClr val="0F172A"/>
+                          </a:solidFill>
+                          <a:latin typeface="Aptos"/>
+                        </a:defRPr>
+                      </a:pPr>
+                      <a:r>
+                        <a:t>0.440</a:t>
+                      </a:r>
+                    </a:p>
+                  </a:txBody>
+                  <a:tcPr>
+                    <a:solidFill>
+                      <a:srgbClr val="FFFFFF"/>
+                    </a:solidFill>
+                  </a:tcPr>
+                </a:tc>
+                <a:tc>
+                  <a:txBody>
+                    <a:bodyPr/>
+                    <a:lstStyle/>
+                    <a:p>
+                      <a:pPr>
+                        <a:defRPr sz="1200" b="0">
+                          <a:solidFill>
+                            <a:srgbClr val="0F172A"/>
+                          </a:solidFill>
+                          <a:latin typeface="Aptos"/>
+                        </a:defRPr>
+                      </a:pPr>
+                      <a:r>
+                        <a:t>0.803</a:t>
+                      </a:r>
+                    </a:p>
+                  </a:txBody>
+                  <a:tcPr>
+                    <a:solidFill>
+                      <a:srgbClr val="FFFFFF"/>
+                    </a:solidFill>
+                  </a:tcPr>
+                </a:tc>
+              </a:tr>
+              <a:tr h="393192">
+                <a:tc>
+                  <a:txBody>
+                    <a:bodyPr/>
+                    <a:lstStyle/>
+                    <a:p>
+                      <a:pPr>
+                        <a:defRPr sz="1200" b="0">
+                          <a:solidFill>
+                            <a:srgbClr val="0F172A"/>
+                          </a:solidFill>
+                          <a:latin typeface="Aptos"/>
+                        </a:defRPr>
+                      </a:pPr>
+                      <a:r>
+                        <a:t>CodeBERT reduced</a:t>
+                      </a:r>
+                    </a:p>
+                  </a:txBody>
+                  <a:tcPr>
+                    <a:solidFill>
+                      <a:srgbClr val="FFFFFF"/>
+                    </a:solidFill>
+                  </a:tcPr>
+                </a:tc>
+                <a:tc>
+                  <a:txBody>
+                    <a:bodyPr/>
+                    <a:lstStyle/>
+                    <a:p>
+                      <a:pPr>
+                        <a:defRPr sz="1200" b="0">
+                          <a:solidFill>
+                            <a:srgbClr val="0F172A"/>
+                          </a:solidFill>
+                          <a:latin typeface="Aptos"/>
+                        </a:defRPr>
+                      </a:pPr>
+                      <a:r>
+                        <a:t>CodeContests binary</a:t>
+                      </a:r>
+                    </a:p>
+                  </a:txBody>
+                  <a:tcPr>
+                    <a:solidFill>
+                      <a:srgbClr val="FFFFFF"/>
+                    </a:solidFill>
+                  </a:tcPr>
+                </a:tc>
+                <a:tc>
+                  <a:txBody>
+                    <a:bodyPr/>
+                    <a:lstStyle/>
+                    <a:p>
+                      <a:pPr>
+                        <a:defRPr sz="1200" b="0">
+                          <a:solidFill>
+                            <a:srgbClr val="0F172A"/>
+                          </a:solidFill>
+                          <a:latin typeface="Aptos"/>
+                        </a:defRPr>
+                      </a:pPr>
+                      <a:r>
+                        <a:t>2,000</a:t>
+                      </a:r>
+                    </a:p>
+                  </a:txBody>
+                  <a:tcPr>
+                    <a:solidFill>
+                      <a:srgbClr val="FFFFFF"/>
+                    </a:solidFill>
+                  </a:tcPr>
+                </a:tc>
+                <a:tc>
+                  <a:txBody>
+                    <a:bodyPr/>
+                    <a:lstStyle/>
+                    <a:p>
+                      <a:pPr>
+                        <a:defRPr sz="1200" b="0">
+                          <a:solidFill>
+                            <a:srgbClr val="0F172A"/>
+                          </a:solidFill>
+                          <a:latin typeface="Aptos"/>
+                        </a:defRPr>
+                      </a:pPr>
+                      <a:r>
+                        <a:t>2,059</a:t>
+                      </a:r>
+                    </a:p>
+                  </a:txBody>
+                  <a:tcPr>
+                    <a:solidFill>
+                      <a:srgbClr val="FFFFFF"/>
+                    </a:solidFill>
+                  </a:tcPr>
+                </a:tc>
+                <a:tc>
+                  <a:txBody>
+                    <a:bodyPr/>
+                    <a:lstStyle/>
+                    <a:p>
+                      <a:pPr>
+                        <a:defRPr sz="1200" b="0">
+                          <a:solidFill>
+                            <a:srgbClr val="0F172A"/>
+                          </a:solidFill>
+                          <a:latin typeface="Aptos"/>
+                        </a:defRPr>
+                      </a:pPr>
+                      <a:r>
+                        <a:t>0.661</a:t>
+                      </a:r>
+                    </a:p>
+                  </a:txBody>
+                  <a:tcPr>
+                    <a:solidFill>
+                      <a:srgbClr val="FFFFFF"/>
+                    </a:solidFill>
+                  </a:tcPr>
+                </a:tc>
+                <a:tc>
+                  <a:txBody>
+                    <a:bodyPr/>
+                    <a:lstStyle/>
+                    <a:p>
+                      <a:pPr>
+                        <a:defRPr sz="1200" b="0">
+                          <a:solidFill>
+                            <a:srgbClr val="0F172A"/>
+                          </a:solidFill>
+                          <a:latin typeface="Aptos"/>
+                        </a:defRPr>
+                      </a:pPr>
+                      <a:r>
+                        <a:t>0.458</a:t>
+                      </a:r>
+                    </a:p>
+                  </a:txBody>
+                  <a:tcPr>
+                    <a:solidFill>
+                      <a:srgbClr val="FFFFFF"/>
+                    </a:solidFill>
+                  </a:tcPr>
+                </a:tc>
+                <a:tc>
+                  <a:txBody>
+                    <a:bodyPr/>
+                    <a:lstStyle/>
+                    <a:p>
+                      <a:pPr>
+                        <a:defRPr sz="1200" b="0">
+                          <a:solidFill>
+                            <a:srgbClr val="0F172A"/>
+                          </a:solidFill>
+                          <a:latin typeface="Aptos"/>
+                        </a:defRPr>
+                      </a:pPr>
+                      <a:r>
+                        <a:t>0.770</a:t>
+                      </a:r>
+                    </a:p>
+                  </a:txBody>
+                  <a:tcPr>
+                    <a:solidFill>
+                      <a:srgbClr val="FFFFFF"/>
+                    </a:solidFill>
+                  </a:tcPr>
+                </a:tc>
+              </a:tr>
+            </a:tbl>
+          </a:graphicData>
+        </a:graphic>
+      </p:graphicFrame>
+      <p:pic>
+        <p:nvPicPr>
+          <p:cNvPr id="5" name="Picture 4" descr="all_model_metrics.png"/>
+          <p:cNvPicPr>
+            <a:picLocks noChangeAspect="1"/>
+          </p:cNvPicPr>
+          <p:nvPr/>
+        </p:nvPicPr>
+        <p:blipFill>
+          <a:blip r:embed="rId2"/>
+          <a:stretch>
+            <a:fillRect/>
+          </a:stretch>
+        </p:blipFill>
+        <p:spPr>
+          <a:xfrm>
+            <a:off x="1371600" y="3611880"/>
+            <a:ext cx="9418320" cy="5023104"/>
+          </a:xfrm>
+          <a:prstGeom prst="rect">
+            <a:avLst/>
+          </a:prstGeom>
+        </p:spPr>
+      </p:pic>
     </p:spTree>
   </p:cSld>
   <p:clrMapOvr>
@@ -4683,7 +6630,7 @@
     <p:bg>
       <p:bgPr>
         <a:solidFill>
-          <a:srgbClr val="0C172A"/>
+          <a:srgbClr val="F8FAFC"/>
         </a:solidFill>
         <a:effectLst/>
       </p:bgPr>
@@ -4703,8 +6650,8 @@
         </p:nvSpPr>
         <p:spPr>
           <a:xfrm>
-            <a:off x="640080" y="411480"/>
-            <a:ext cx="10881360" cy="731520"/>
+            <a:off x="502920" y="320040"/>
+            <a:ext cx="11155680" cy="502920"/>
           </a:xfrm>
           <a:prstGeom prst="rect">
             <a:avLst/>
@@ -4712,21 +6659,21 @@
           <a:noFill/>
         </p:spPr>
         <p:txBody>
-          <a:bodyPr wrap="none">
-            <a:spAutoFit/>
+          <a:bodyPr wrap="square">
+            <a:normAutofit/>
           </a:bodyPr>
           <a:lstStyle/>
           <a:p>
             <a:pPr>
-              <a:defRPr sz="2800" b="1">
-                <a:solidFill>
-                  <a:srgbClr val="F1F5F9"/>
-                </a:solidFill>
-                <a:latin typeface="Aptos Display"/>
+              <a:defRPr sz="2700" b="1">
+                <a:solidFill>
+                  <a:srgbClr val="0F172A"/>
+                </a:solidFill>
+                <a:latin typeface="Aptos"/>
               </a:defRPr>
             </a:pPr>
             <a:r>
-              <a:t>Experimental protocol</a:t>
+              <a:t>What the real-data results mean</a:t>
             </a:r>
           </a:p>
         </p:txBody>
@@ -4739,8 +6686,8 @@
         </p:nvSpPr>
         <p:spPr>
           <a:xfrm>
-            <a:off x="822960" y="1508760"/>
-            <a:ext cx="10424160" cy="4663440"/>
+            <a:off x="731520" y="1417320"/>
+            <a:ext cx="10789920" cy="4846320"/>
           </a:xfrm>
           <a:prstGeom prst="rect">
             <a:avLst/>
@@ -4748,72 +6695,88 @@
           <a:noFill/>
         </p:spPr>
         <p:txBody>
-          <a:bodyPr wrap="none">
-            <a:spAutoFit/>
+          <a:bodyPr wrap="square">
+            <a:normAutofit/>
           </a:bodyPr>
           <a:lstStyle/>
           <a:p>
             <a:pPr>
               <a:spcAft>
-                <a:spcPts val="1700"/>
+                <a:spcPts val="1200"/>
               </a:spcAft>
-              <a:defRPr sz="2100">
-                <a:solidFill>
-                  <a:srgbClr val="F1F5F9"/>
+              <a:defRPr sz="1900">
+                <a:solidFill>
+                  <a:srgbClr val="0F172A"/>
                 </a:solidFill>
                 <a:latin typeface="Aptos"/>
               </a:defRPr>
             </a:pPr>
             <a:r>
-              <a:t>Synthetic: 732 training and 244 unseen test examples.</a:t>
+              <a:t>The CodeContests test set contains 2,000 correct solutions and only 59 syntax errors.</a:t>
             </a:r>
           </a:p>
           <a:p>
             <a:pPr>
               <a:spcAft>
-                <a:spcPts val="1700"/>
+                <a:spcPts val="1200"/>
               </a:spcAft>
-              <a:defRPr sz="2100">
-                <a:solidFill>
-                  <a:srgbClr val="F1F5F9"/>
+              <a:defRPr sz="1900">
+                <a:solidFill>
+                  <a:srgbClr val="0F172A"/>
                 </a:solidFill>
                 <a:latin typeface="Aptos"/>
               </a:defRPr>
             </a:pPr>
             <a:r>
-              <a:t>CodeContests: 19,999 training and 2,059 official test examples.</a:t>
+              <a:t>SVM: 18/59 syntax errors found; syntax precision 0.03 and recall 0.31.</a:t>
             </a:r>
           </a:p>
           <a:p>
             <a:pPr>
               <a:spcAft>
-                <a:spcPts val="1700"/>
+                <a:spcPts val="1200"/>
               </a:spcAft>
-              <a:defRPr sz="2100">
-                <a:solidFill>
-                  <a:srgbClr val="F1F5F9"/>
+              <a:defRPr sz="1900">
+                <a:solidFill>
+                  <a:srgbClr val="0F172A"/>
                 </a:solidFill>
                 <a:latin typeface="Aptos"/>
               </a:defRPr>
             </a:pPr>
             <a:r>
-              <a:t>Primary metric: Macro F1; accuracy is secondary under imbalance.</a:t>
+              <a:t>Reduced CodeBERT: 51/59 syntax errors found; syntax precision 0.07 and recall 0.86.</a:t>
             </a:r>
           </a:p>
           <a:p>
             <a:pPr>
               <a:spcAft>
-                <a:spcPts val="1700"/>
+                <a:spcPts val="1200"/>
               </a:spcAft>
-              <a:defRPr sz="2100">
-                <a:solidFill>
-                  <a:srgbClr val="F1F5F9"/>
+              <a:defRPr sz="1900">
+                <a:solidFill>
+                  <a:srgbClr val="0F172A"/>
                 </a:solidFill>
                 <a:latin typeface="Aptos"/>
               </a:defRPr>
             </a:pPr>
             <a:r>
-              <a:t>Four planned runs: SVM and CodeBERT on both datasets.</a:t>
+              <a:t>CodeBERT improves recall, but many correct programs are incorrectly flagged.</a:t>
+            </a:r>
+          </a:p>
+          <a:p>
+            <a:pPr>
+              <a:spcAft>
+                <a:spcPts val="1200"/>
+              </a:spcAft>
+              <a:defRPr sz="1900">
+                <a:solidFill>
+                  <a:srgbClr val="0F172A"/>
+                </a:solidFill>
+                <a:latin typeface="Aptos"/>
+              </a:defRPr>
+            </a:pPr>
+            <a:r>
+              <a:t>The achievement is an honest validation boundary, not a claim of deployment-ready accuracy.</a:t>
             </a:r>
           </a:p>
         </p:txBody>
